--- a/PPTs/11_Experiment_11_MongoDB_Databases_Collections_and_Records.pptx
+++ b/PPTs/11_Experiment_11_MongoDB_Databases_Collections_and_Records.pptx
@@ -13,8 +13,6 @@
     <p:sldId id="261" r:id="rId12"/>
     <p:sldId id="262" r:id="rId13"/>
     <p:sldId id="263" r:id="rId14"/>
-    <p:sldId id="264" r:id="rId15"/>
-    <p:sldId id="265" r:id="rId16"/>
   </p:sldIdLst>
   <p:sldSz cx="12191695" cy="6858000" type="screen4x3"/>
   <p:notesSz cx="6858000" cy="9144000"/>
@@ -3292,7 +3290,7 @@
 </p:sld>
 </file>
 
-<file path=ppt/slides/slide10.xml><?xml version="1.0" encoding="utf-8"?>
+<file path=ppt/slides/slide2.xml><?xml version="1.0" encoding="utf-8"?>
 <p:sld xmlns:a="http://schemas.openxmlformats.org/drawingml/2006/main" xmlns:p="http://schemas.openxmlformats.org/presentationml/2006/main" xmlns:r="http://schemas.openxmlformats.org/officeDocument/2006/relationships">
   <p:cSld>
     <p:spTree>
@@ -3376,7 +3374,7 @@
               </a:defRPr>
             </a:pPr>
             <a:r>
-              <a:t>Viva preparation</a:t>
+              <a:t>Syllabus tasks</a:t>
             </a:r>
           </a:p>
         </p:txBody>
@@ -3491,7 +3489,7 @@
               </a:defRPr>
             </a:pPr>
             <a:r>
-              <a:t>What is the purpose of this experiment?</a:t>
+              <a:t>Creating/listing databases and collections.</a:t>
             </a:r>
           </a:p>
         </p:txBody>
@@ -3563,7 +3561,7 @@
               </a:defRPr>
             </a:pPr>
             <a:r>
-              <a:t>Which input is required?</a:t>
+              <a:t>`find()`, `findOne()`, filters, projection and count.</a:t>
             </a:r>
           </a:p>
         </p:txBody>
@@ -3635,7 +3633,7 @@
               </a:defRPr>
             </a:pPr>
             <a:r>
-              <a:t>Which line or command performs the main operation?</a:t>
+              <a:t>`limit()`, `skip()` and `sort()`.</a:t>
             </a:r>
           </a:p>
         </p:txBody>
@@ -3707,7 +3705,7 @@
               </a:defRPr>
             </a:pPr>
             <a:r>
-              <a:t>What output should you observe?</a:t>
+              <a:t>Single, compound and unique indexes, index listing and query plan.</a:t>
             </a:r>
           </a:p>
         </p:txBody>
@@ -3757,7 +3755,7 @@
         <p:spPr>
           <a:xfrm>
             <a:off x="1115568" y="3968496"/>
-            <a:ext cx="10241280" cy="384048"/>
+            <a:ext cx="10241280" cy="640080"/>
           </a:xfrm>
           <a:prstGeom prst="rect">
             <a:avLst/>
@@ -3779,543 +3777,11 @@
               </a:defRPr>
             </a:pPr>
             <a:r>
-              <a:t>What happens when the input changes?</a:t>
-            </a:r>
-          </a:p>
-        </p:txBody>
-      </p:sp>
-    </p:spTree>
-  </p:cSld>
-  <p:clrMapOvr>
-    <a:masterClrMapping/>
-  </p:clrMapOvr>
-</p:sld>
-</file>
-
-<file path=ppt/slides/slide2.xml><?xml version="1.0" encoding="utf-8"?>
-<p:sld xmlns:a="http://schemas.openxmlformats.org/drawingml/2006/main" xmlns:p="http://schemas.openxmlformats.org/presentationml/2006/main" xmlns:r="http://schemas.openxmlformats.org/officeDocument/2006/relationships">
-  <p:cSld>
-    <p:spTree>
-      <p:nvGrpSpPr>
-        <p:cNvPr id="1" name=""/>
-        <p:cNvGrpSpPr/>
-        <p:nvPr/>
-      </p:nvGrpSpPr>
-      <p:grpSpPr/>
-      <p:sp>
-        <p:nvSpPr>
-          <p:cNvPr id="2" name="Rectangle 1"/>
-          <p:cNvSpPr/>
-          <p:nvPr/>
-        </p:nvSpPr>
-        <p:spPr>
-          <a:xfrm>
-            <a:off x="0" y="0"/>
-            <a:ext cx="12191695" cy="6858000"/>
-          </a:xfrm>
-          <a:prstGeom prst="rect">
-            <a:avLst/>
-          </a:prstGeom>
-          <a:solidFill>
-            <a:srgbClr val="FFFFFF"/>
-          </a:solidFill>
-          <a:ln>
-            <a:noFill/>
-          </a:ln>
-        </p:spPr>
-        <p:style>
-          <a:lnRef idx="1">
-            <a:schemeClr val="accent1"/>
-          </a:lnRef>
-          <a:fillRef idx="3">
-            <a:schemeClr val="accent1"/>
-          </a:fillRef>
-          <a:effectRef idx="2">
-            <a:schemeClr val="accent1"/>
-          </a:effectRef>
-          <a:fontRef idx="minor">
-            <a:schemeClr val="lt1"/>
-          </a:fontRef>
-        </p:style>
-        <p:txBody>
-          <a:bodyPr rtlCol="0" anchor="ctr"/>
-          <a:lstStyle/>
-          <a:p>
-            <a:pPr algn="ctr"/>
-          </a:p>
-        </p:txBody>
-      </p:sp>
-      <p:sp>
-        <p:nvSpPr>
-          <p:cNvPr id="3" name="TextBox 2"/>
-          <p:cNvSpPr txBox="1"/>
-          <p:nvPr/>
-        </p:nvSpPr>
-        <p:spPr>
-          <a:xfrm>
-            <a:off x="594360" y="274320"/>
-            <a:ext cx="10927080" cy="621792"/>
-          </a:xfrm>
-          <a:prstGeom prst="rect">
-            <a:avLst/>
-          </a:prstGeom>
-          <a:noFill/>
-        </p:spPr>
-        <p:txBody>
-          <a:bodyPr wrap="square" lIns="45720" rIns="45720" tIns="27432" bIns="27432" anchor="ctr">
-            <a:spAutoFit/>
-          </a:bodyPr>
-          <a:lstStyle/>
-          <a:p>
-            <a:pPr algn="l">
-              <a:defRPr sz="2700" b="1">
-                <a:solidFill>
-                  <a:srgbClr val="1B2B4B"/>
-                </a:solidFill>
-                <a:latin typeface="Aptos"/>
-              </a:defRPr>
-            </a:pPr>
-            <a:r>
-              <a:t>Syllabus tasks</a:t>
-            </a:r>
-          </a:p>
-        </p:txBody>
-      </p:sp>
-      <p:sp>
-        <p:nvSpPr>
-          <p:cNvPr id="4" name="Rectangle 3"/>
-          <p:cNvSpPr/>
-          <p:nvPr/>
-        </p:nvSpPr>
-        <p:spPr>
-          <a:xfrm>
-            <a:off x="594360" y="950976"/>
-            <a:ext cx="1143000" cy="54864"/>
-          </a:xfrm>
-          <a:prstGeom prst="rect">
-            <a:avLst/>
-          </a:prstGeom>
-          <a:solidFill>
-            <a:srgbClr val="305D9C"/>
-          </a:solidFill>
-          <a:ln>
-            <a:noFill/>
-          </a:ln>
-        </p:spPr>
-        <p:style>
-          <a:lnRef idx="1">
-            <a:schemeClr val="accent1"/>
-          </a:lnRef>
-          <a:fillRef idx="3">
-            <a:schemeClr val="accent1"/>
-          </a:fillRef>
-          <a:effectRef idx="2">
-            <a:schemeClr val="accent1"/>
-          </a:effectRef>
-          <a:fontRef idx="minor">
-            <a:schemeClr val="lt1"/>
-          </a:fontRef>
-        </p:style>
-        <p:txBody>
-          <a:bodyPr rtlCol="0" anchor="ctr"/>
-          <a:lstStyle/>
-          <a:p>
-            <a:pPr algn="ctr"/>
-          </a:p>
-        </p:txBody>
-      </p:sp>
-      <p:sp>
-        <p:nvSpPr>
-          <p:cNvPr id="5" name="TextBox 4"/>
-          <p:cNvSpPr txBox="1"/>
-          <p:nvPr/>
-        </p:nvSpPr>
-        <p:spPr>
-          <a:xfrm>
-            <a:off x="1874519" y="356616"/>
-            <a:ext cx="9326880" cy="365760"/>
-          </a:xfrm>
-          <a:prstGeom prst="rect">
-            <a:avLst/>
-          </a:prstGeom>
-          <a:noFill/>
-        </p:spPr>
-        <p:txBody>
-          <a:bodyPr wrap="square" lIns="45720" rIns="45720" tIns="27432" bIns="27432" anchor="t">
-            <a:spAutoFit/>
-          </a:bodyPr>
-          <a:lstStyle/>
-          <a:p>
-            <a:pPr algn="l">
-              <a:defRPr sz="1300" b="0">
-                <a:solidFill>
-                  <a:srgbClr val="666E7A"/>
-                </a:solidFill>
-                <a:latin typeface="Aptos"/>
-              </a:defRPr>
-            </a:pPr>
-            <a:r>
-              <a:t>Part 1</a:t>
-            </a:r>
-          </a:p>
-        </p:txBody>
-      </p:sp>
-      <p:sp>
-        <p:nvSpPr>
-          <p:cNvPr id="6" name="TextBox 5"/>
-          <p:cNvSpPr txBox="1"/>
-          <p:nvPr/>
-        </p:nvSpPr>
-        <p:spPr>
-          <a:xfrm>
-            <a:off x="777240" y="1417320"/>
-            <a:ext cx="292608" cy="365760"/>
-          </a:xfrm>
-          <a:prstGeom prst="rect">
-            <a:avLst/>
-          </a:prstGeom>
-          <a:noFill/>
-        </p:spPr>
-        <p:txBody>
-          <a:bodyPr wrap="square" lIns="45720" rIns="45720" tIns="27432" bIns="27432" anchor="t">
-            <a:spAutoFit/>
-          </a:bodyPr>
-          <a:lstStyle/>
-          <a:p>
-            <a:pPr algn="l">
-              <a:defRPr sz="2200" b="1">
-                <a:solidFill>
-                  <a:srgbClr val="305D9C"/>
-                </a:solidFill>
-                <a:latin typeface="Aptos"/>
-              </a:defRPr>
-            </a:pPr>
-            <a:r>
-              <a:t>•</a:t>
-            </a:r>
-          </a:p>
-        </p:txBody>
-      </p:sp>
-      <p:sp>
-        <p:nvSpPr>
-          <p:cNvPr id="7" name="TextBox 6"/>
-          <p:cNvSpPr txBox="1"/>
-          <p:nvPr/>
-        </p:nvSpPr>
-        <p:spPr>
-          <a:xfrm>
-            <a:off x="1115568" y="1408176"/>
-            <a:ext cx="10241280" cy="384048"/>
-          </a:xfrm>
-          <a:prstGeom prst="rect">
-            <a:avLst/>
-          </a:prstGeom>
-          <a:noFill/>
-        </p:spPr>
-        <p:txBody>
-          <a:bodyPr wrap="square" lIns="45720" rIns="45720" tIns="27432" bIns="27432" anchor="t">
-            <a:spAutoFit/>
-          </a:bodyPr>
-          <a:lstStyle/>
-          <a:p>
-            <a:pPr algn="l">
-              <a:defRPr sz="1800" b="0">
-                <a:solidFill>
-                  <a:srgbClr val="23272F"/>
-                </a:solidFill>
-                <a:latin typeface="Aptos"/>
-              </a:defRPr>
-            </a:pPr>
-            <a:r>
-              <a:t>Create a database context.</a:t>
-            </a:r>
-          </a:p>
-        </p:txBody>
-      </p:sp>
-      <p:sp>
-        <p:nvSpPr>
-          <p:cNvPr id="8" name="TextBox 7"/>
-          <p:cNvSpPr txBox="1"/>
-          <p:nvPr/>
-        </p:nvSpPr>
-        <p:spPr>
-          <a:xfrm>
-            <a:off x="777240" y="2057400"/>
-            <a:ext cx="292608" cy="365760"/>
-          </a:xfrm>
-          <a:prstGeom prst="rect">
-            <a:avLst/>
-          </a:prstGeom>
-          <a:noFill/>
-        </p:spPr>
-        <p:txBody>
-          <a:bodyPr wrap="square" lIns="45720" rIns="45720" tIns="27432" bIns="27432" anchor="t">
-            <a:spAutoFit/>
-          </a:bodyPr>
-          <a:lstStyle/>
-          <a:p>
-            <a:pPr algn="l">
-              <a:defRPr sz="2200" b="1">
-                <a:solidFill>
-                  <a:srgbClr val="305D9C"/>
-                </a:solidFill>
-                <a:latin typeface="Aptos"/>
-              </a:defRPr>
-            </a:pPr>
-            <a:r>
-              <a:t>•</a:t>
-            </a:r>
-          </a:p>
-        </p:txBody>
-      </p:sp>
-      <p:sp>
-        <p:nvSpPr>
-          <p:cNvPr id="9" name="TextBox 8"/>
-          <p:cNvSpPr txBox="1"/>
-          <p:nvPr/>
-        </p:nvSpPr>
-        <p:spPr>
-          <a:xfrm>
-            <a:off x="1115568" y="2048256"/>
-            <a:ext cx="10241280" cy="384048"/>
-          </a:xfrm>
-          <a:prstGeom prst="rect">
-            <a:avLst/>
-          </a:prstGeom>
-          <a:noFill/>
-        </p:spPr>
-        <p:txBody>
-          <a:bodyPr wrap="square" lIns="45720" rIns="45720" tIns="27432" bIns="27432" anchor="t">
-            <a:spAutoFit/>
-          </a:bodyPr>
-          <a:lstStyle/>
-          <a:p>
-            <a:pPr algn="l">
-              <a:defRPr sz="1800" b="0">
-                <a:solidFill>
-                  <a:srgbClr val="23272F"/>
-                </a:solidFill>
-                <a:latin typeface="Aptos"/>
-              </a:defRPr>
-            </a:pPr>
-            <a:r>
-              <a:t>Create a students collection.</a:t>
-            </a:r>
-          </a:p>
-        </p:txBody>
-      </p:sp>
-      <p:sp>
-        <p:nvSpPr>
-          <p:cNvPr id="10" name="TextBox 9"/>
-          <p:cNvSpPr txBox="1"/>
-          <p:nvPr/>
-        </p:nvSpPr>
-        <p:spPr>
-          <a:xfrm>
-            <a:off x="777240" y="2697480"/>
-            <a:ext cx="292608" cy="365760"/>
-          </a:xfrm>
-          <a:prstGeom prst="rect">
-            <a:avLst/>
-          </a:prstGeom>
-          <a:noFill/>
-        </p:spPr>
-        <p:txBody>
-          <a:bodyPr wrap="square" lIns="45720" rIns="45720" tIns="27432" bIns="27432" anchor="t">
-            <a:spAutoFit/>
-          </a:bodyPr>
-          <a:lstStyle/>
-          <a:p>
-            <a:pPr algn="l">
-              <a:defRPr sz="2200" b="1">
-                <a:solidFill>
-                  <a:srgbClr val="305D9C"/>
-                </a:solidFill>
-                <a:latin typeface="Aptos"/>
-              </a:defRPr>
-            </a:pPr>
-            <a:r>
-              <a:t>•</a:t>
-            </a:r>
-          </a:p>
-        </p:txBody>
-      </p:sp>
-      <p:sp>
-        <p:nvSpPr>
-          <p:cNvPr id="11" name="TextBox 10"/>
-          <p:cNvSpPr txBox="1"/>
-          <p:nvPr/>
-        </p:nvSpPr>
-        <p:spPr>
-          <a:xfrm>
-            <a:off x="1115568" y="2688336"/>
-            <a:ext cx="10241280" cy="384048"/>
-          </a:xfrm>
-          <a:prstGeom prst="rect">
-            <a:avLst/>
-          </a:prstGeom>
-          <a:noFill/>
-        </p:spPr>
-        <p:txBody>
-          <a:bodyPr wrap="square" lIns="45720" rIns="45720" tIns="27432" bIns="27432" anchor="t">
-            <a:spAutoFit/>
-          </a:bodyPr>
-          <a:lstStyle/>
-          <a:p>
-            <a:pPr algn="l">
-              <a:defRPr sz="1800" b="0">
-                <a:solidFill>
-                  <a:srgbClr val="23272F"/>
-                </a:solidFill>
-                <a:latin typeface="Aptos"/>
-              </a:defRPr>
-            </a:pPr>
-            <a:r>
-              <a:t>Insert multiple records.</a:t>
-            </a:r>
-          </a:p>
-        </p:txBody>
-      </p:sp>
-      <p:sp>
-        <p:nvSpPr>
-          <p:cNvPr id="12" name="TextBox 11"/>
-          <p:cNvSpPr txBox="1"/>
-          <p:nvPr/>
-        </p:nvSpPr>
-        <p:spPr>
-          <a:xfrm>
-            <a:off x="777240" y="3337560"/>
-            <a:ext cx="292608" cy="365760"/>
-          </a:xfrm>
-          <a:prstGeom prst="rect">
-            <a:avLst/>
-          </a:prstGeom>
-          <a:noFill/>
-        </p:spPr>
-        <p:txBody>
-          <a:bodyPr wrap="square" lIns="45720" rIns="45720" tIns="27432" bIns="27432" anchor="t">
-            <a:spAutoFit/>
-          </a:bodyPr>
-          <a:lstStyle/>
-          <a:p>
-            <a:pPr algn="l">
-              <a:defRPr sz="2200" b="1">
-                <a:solidFill>
-                  <a:srgbClr val="305D9C"/>
-                </a:solidFill>
-                <a:latin typeface="Aptos"/>
-              </a:defRPr>
-            </a:pPr>
-            <a:r>
-              <a:t>•</a:t>
-            </a:r>
-          </a:p>
-        </p:txBody>
-      </p:sp>
-      <p:sp>
-        <p:nvSpPr>
-          <p:cNvPr id="13" name="TextBox 12"/>
-          <p:cNvSpPr txBox="1"/>
-          <p:nvPr/>
-        </p:nvSpPr>
-        <p:spPr>
-          <a:xfrm>
-            <a:off x="1115568" y="3328416"/>
-            <a:ext cx="10241280" cy="384048"/>
-          </a:xfrm>
-          <a:prstGeom prst="rect">
-            <a:avLst/>
-          </a:prstGeom>
-          <a:noFill/>
-        </p:spPr>
-        <p:txBody>
-          <a:bodyPr wrap="square" lIns="45720" rIns="45720" tIns="27432" bIns="27432" anchor="t">
-            <a:spAutoFit/>
-          </a:bodyPr>
-          <a:lstStyle/>
-          <a:p>
-            <a:pPr algn="l">
-              <a:defRPr sz="1800" b="0">
-                <a:solidFill>
-                  <a:srgbClr val="23272F"/>
-                </a:solidFill>
-                <a:latin typeface="Aptos"/>
-              </a:defRPr>
-            </a:pPr>
-            <a:r>
-              <a:t>Find records.</a:t>
-            </a:r>
-          </a:p>
-        </p:txBody>
-      </p:sp>
-      <p:sp>
-        <p:nvSpPr>
-          <p:cNvPr id="14" name="TextBox 13"/>
-          <p:cNvSpPr txBox="1"/>
-          <p:nvPr/>
-        </p:nvSpPr>
-        <p:spPr>
-          <a:xfrm>
-            <a:off x="777240" y="3977640"/>
-            <a:ext cx="292608" cy="365760"/>
-          </a:xfrm>
-          <a:prstGeom prst="rect">
-            <a:avLst/>
-          </a:prstGeom>
-          <a:noFill/>
-        </p:spPr>
-        <p:txBody>
-          <a:bodyPr wrap="square" lIns="45720" rIns="45720" tIns="27432" bIns="27432" anchor="t">
-            <a:spAutoFit/>
-          </a:bodyPr>
-          <a:lstStyle/>
-          <a:p>
-            <a:pPr algn="l">
-              <a:defRPr sz="2200" b="1">
-                <a:solidFill>
-                  <a:srgbClr val="305D9C"/>
-                </a:solidFill>
-                <a:latin typeface="Aptos"/>
-              </a:defRPr>
-            </a:pPr>
-            <a:r>
-              <a:t>•</a:t>
-            </a:r>
-          </a:p>
-        </p:txBody>
-      </p:sp>
-      <p:sp>
-        <p:nvSpPr>
-          <p:cNvPr id="15" name="TextBox 14"/>
-          <p:cNvSpPr txBox="1"/>
-          <p:nvPr/>
-        </p:nvSpPr>
-        <p:spPr>
-          <a:xfrm>
-            <a:off x="1115568" y="3968496"/>
-            <a:ext cx="10241280" cy="384048"/>
-          </a:xfrm>
-          <a:prstGeom prst="rect">
-            <a:avLst/>
-          </a:prstGeom>
-          <a:noFill/>
-        </p:spPr>
-        <p:txBody>
-          <a:bodyPr wrap="square" lIns="45720" rIns="45720" tIns="27432" bIns="27432" anchor="t">
-            <a:spAutoFit/>
-          </a:bodyPr>
-          <a:lstStyle/>
-          <a:p>
-            <a:pPr algn="l">
-              <a:defRPr sz="1800" b="0">
-                <a:solidFill>
-                  <a:srgbClr val="23272F"/>
-                </a:solidFill>
-                <a:latin typeface="Aptos"/>
-              </a:defRPr>
-            </a:pPr>
-            <a:r>
-              <a:t>Limit the number of results.</a:t>
+              <a:t>Aggregation with `$match`, `$group`, `$avg`, `$max`, `$push`,</a:t>
+            </a:r>
+            <a:br/>
+            <a:r>
+              <a:t>`$project`, `$sort`, `$limit`, and `$count`.</a:t>
             </a:r>
           </a:p>
         </p:txBody>
@@ -4412,7 +3878,7 @@
               </a:defRPr>
             </a:pPr>
             <a:r>
-              <a:t>Syllabus tasks</a:t>
+              <a:t>How it works</a:t>
             </a:r>
           </a:p>
         </p:txBody>
@@ -4460,16 +3926,40 @@
           </a:p>
         </p:txBody>
       </p:sp>
-      <p:sp>
-        <p:nvSpPr>
-          <p:cNvPr id="5" name="TextBox 4"/>
+      <p:pic>
+        <p:nvPicPr>
+          <p:cNvPr id="5" name="Picture 4" descr="11_workflow.png"/>
+          <p:cNvPicPr>
+            <a:picLocks noChangeAspect="1"/>
+          </p:cNvPicPr>
+          <p:nvPr/>
+        </p:nvPicPr>
+        <p:blipFill>
+          <a:blip r:embed="rId2"/>
+          <a:stretch>
+            <a:fillRect/>
+          </a:stretch>
+        </p:blipFill>
+        <p:spPr>
+          <a:xfrm>
+            <a:off x="594360" y="1280160"/>
+            <a:ext cx="10972800" cy="5074920"/>
+          </a:xfrm>
+          <a:prstGeom prst="rect">
+            <a:avLst/>
+          </a:prstGeom>
+        </p:spPr>
+      </p:pic>
+      <p:sp>
+        <p:nvSpPr>
+          <p:cNvPr id="6" name="TextBox 5"/>
           <p:cNvSpPr txBox="1"/>
           <p:nvPr/>
         </p:nvSpPr>
         <p:spPr>
           <a:xfrm>
-            <a:off x="1874519" y="356616"/>
-            <a:ext cx="9326880" cy="365760"/>
+            <a:off x="777240" y="6437376"/>
+            <a:ext cx="10607040" cy="228600"/>
           </a:xfrm>
           <a:prstGeom prst="rect">
             <a:avLst/>
@@ -4482,8 +3972,8 @@
           </a:bodyPr>
           <a:lstStyle/>
           <a:p>
-            <a:pPr algn="l">
-              <a:defRPr sz="1300" b="0">
+            <a:pPr algn="ctr">
+              <a:defRPr sz="1200" b="0">
                 <a:solidFill>
                   <a:srgbClr val="666E7A"/>
                 </a:solidFill>
@@ -4491,367 +3981,7 @@
               </a:defRPr>
             </a:pPr>
             <a:r>
-              <a:t>Part 2</a:t>
-            </a:r>
-          </a:p>
-        </p:txBody>
-      </p:sp>
-      <p:sp>
-        <p:nvSpPr>
-          <p:cNvPr id="6" name="TextBox 5"/>
-          <p:cNvSpPr txBox="1"/>
-          <p:nvPr/>
-        </p:nvSpPr>
-        <p:spPr>
-          <a:xfrm>
-            <a:off x="777240" y="1417320"/>
-            <a:ext cx="292608" cy="365760"/>
-          </a:xfrm>
-          <a:prstGeom prst="rect">
-            <a:avLst/>
-          </a:prstGeom>
-          <a:noFill/>
-        </p:spPr>
-        <p:txBody>
-          <a:bodyPr wrap="square" lIns="45720" rIns="45720" tIns="27432" bIns="27432" anchor="t">
-            <a:spAutoFit/>
-          </a:bodyPr>
-          <a:lstStyle/>
-          <a:p>
-            <a:pPr algn="l">
-              <a:defRPr sz="2200" b="1">
-                <a:solidFill>
-                  <a:srgbClr val="305D9C"/>
-                </a:solidFill>
-                <a:latin typeface="Aptos"/>
-              </a:defRPr>
-            </a:pPr>
-            <a:r>
-              <a:t>•</a:t>
-            </a:r>
-          </a:p>
-        </p:txBody>
-      </p:sp>
-      <p:sp>
-        <p:nvSpPr>
-          <p:cNvPr id="7" name="TextBox 6"/>
-          <p:cNvSpPr txBox="1"/>
-          <p:nvPr/>
-        </p:nvSpPr>
-        <p:spPr>
-          <a:xfrm>
-            <a:off x="1115568" y="1408176"/>
-            <a:ext cx="10241280" cy="384048"/>
-          </a:xfrm>
-          <a:prstGeom prst="rect">
-            <a:avLst/>
-          </a:prstGeom>
-          <a:noFill/>
-        </p:spPr>
-        <p:txBody>
-          <a:bodyPr wrap="square" lIns="45720" rIns="45720" tIns="27432" bIns="27432" anchor="t">
-            <a:spAutoFit/>
-          </a:bodyPr>
-          <a:lstStyle/>
-          <a:p>
-            <a:pPr algn="l">
-              <a:defRPr sz="1800" b="0">
-                <a:solidFill>
-                  <a:srgbClr val="23272F"/>
-                </a:solidFill>
-                <a:latin typeface="Aptos"/>
-              </a:defRPr>
-            </a:pPr>
-            <a:r>
-              <a:t>Sort by marks.</a:t>
-            </a:r>
-          </a:p>
-        </p:txBody>
-      </p:sp>
-      <p:sp>
-        <p:nvSpPr>
-          <p:cNvPr id="8" name="TextBox 7"/>
-          <p:cNvSpPr txBox="1"/>
-          <p:nvPr/>
-        </p:nvSpPr>
-        <p:spPr>
-          <a:xfrm>
-            <a:off x="777240" y="2057400"/>
-            <a:ext cx="292608" cy="365760"/>
-          </a:xfrm>
-          <a:prstGeom prst="rect">
-            <a:avLst/>
-          </a:prstGeom>
-          <a:noFill/>
-        </p:spPr>
-        <p:txBody>
-          <a:bodyPr wrap="square" lIns="45720" rIns="45720" tIns="27432" bIns="27432" anchor="t">
-            <a:spAutoFit/>
-          </a:bodyPr>
-          <a:lstStyle/>
-          <a:p>
-            <a:pPr algn="l">
-              <a:defRPr sz="2200" b="1">
-                <a:solidFill>
-                  <a:srgbClr val="305D9C"/>
-                </a:solidFill>
-                <a:latin typeface="Aptos"/>
-              </a:defRPr>
-            </a:pPr>
-            <a:r>
-              <a:t>•</a:t>
-            </a:r>
-          </a:p>
-        </p:txBody>
-      </p:sp>
-      <p:sp>
-        <p:nvSpPr>
-          <p:cNvPr id="9" name="TextBox 8"/>
-          <p:cNvSpPr txBox="1"/>
-          <p:nvPr/>
-        </p:nvSpPr>
-        <p:spPr>
-          <a:xfrm>
-            <a:off x="1115568" y="2048256"/>
-            <a:ext cx="10241280" cy="384048"/>
-          </a:xfrm>
-          <a:prstGeom prst="rect">
-            <a:avLst/>
-          </a:prstGeom>
-          <a:noFill/>
-        </p:spPr>
-        <p:txBody>
-          <a:bodyPr wrap="square" lIns="45720" rIns="45720" tIns="27432" bIns="27432" anchor="t">
-            <a:spAutoFit/>
-          </a:bodyPr>
-          <a:lstStyle/>
-          <a:p>
-            <a:pPr algn="l">
-              <a:defRPr sz="1800" b="0">
-                <a:solidFill>
-                  <a:srgbClr val="23272F"/>
-                </a:solidFill>
-                <a:latin typeface="Aptos"/>
-              </a:defRPr>
-            </a:pPr>
-            <a:r>
-              <a:t>Create an index.</a:t>
-            </a:r>
-          </a:p>
-        </p:txBody>
-      </p:sp>
-      <p:sp>
-        <p:nvSpPr>
-          <p:cNvPr id="10" name="TextBox 9"/>
-          <p:cNvSpPr txBox="1"/>
-          <p:nvPr/>
-        </p:nvSpPr>
-        <p:spPr>
-          <a:xfrm>
-            <a:off x="777240" y="2697480"/>
-            <a:ext cx="292608" cy="365760"/>
-          </a:xfrm>
-          <a:prstGeom prst="rect">
-            <a:avLst/>
-          </a:prstGeom>
-          <a:noFill/>
-        </p:spPr>
-        <p:txBody>
-          <a:bodyPr wrap="square" lIns="45720" rIns="45720" tIns="27432" bIns="27432" anchor="t">
-            <a:spAutoFit/>
-          </a:bodyPr>
-          <a:lstStyle/>
-          <a:p>
-            <a:pPr algn="l">
-              <a:defRPr sz="2200" b="1">
-                <a:solidFill>
-                  <a:srgbClr val="305D9C"/>
-                </a:solidFill>
-                <a:latin typeface="Aptos"/>
-              </a:defRPr>
-            </a:pPr>
-            <a:r>
-              <a:t>•</a:t>
-            </a:r>
-          </a:p>
-        </p:txBody>
-      </p:sp>
-      <p:sp>
-        <p:nvSpPr>
-          <p:cNvPr id="11" name="TextBox 10"/>
-          <p:cNvSpPr txBox="1"/>
-          <p:nvPr/>
-        </p:nvSpPr>
-        <p:spPr>
-          <a:xfrm>
-            <a:off x="1115568" y="2688336"/>
-            <a:ext cx="10241280" cy="384048"/>
-          </a:xfrm>
-          <a:prstGeom prst="rect">
-            <a:avLst/>
-          </a:prstGeom>
-          <a:noFill/>
-        </p:spPr>
-        <p:txBody>
-          <a:bodyPr wrap="square" lIns="45720" rIns="45720" tIns="27432" bIns="27432" anchor="t">
-            <a:spAutoFit/>
-          </a:bodyPr>
-          <a:lstStyle/>
-          <a:p>
-            <a:pPr algn="l">
-              <a:defRPr sz="1800" b="0">
-                <a:solidFill>
-                  <a:srgbClr val="23272F"/>
-                </a:solidFill>
-                <a:latin typeface="Aptos"/>
-              </a:defRPr>
-            </a:pPr>
-            <a:r>
-              <a:t>Calculate average marks with aggregation.</a:t>
-            </a:r>
-          </a:p>
-        </p:txBody>
-      </p:sp>
-      <p:sp>
-        <p:nvSpPr>
-          <p:cNvPr id="12" name="TextBox 11"/>
-          <p:cNvSpPr txBox="1"/>
-          <p:nvPr/>
-        </p:nvSpPr>
-        <p:spPr>
-          <a:xfrm>
-            <a:off x="777240" y="3337560"/>
-            <a:ext cx="292608" cy="365760"/>
-          </a:xfrm>
-          <a:prstGeom prst="rect">
-            <a:avLst/>
-          </a:prstGeom>
-          <a:noFill/>
-        </p:spPr>
-        <p:txBody>
-          <a:bodyPr wrap="square" lIns="45720" rIns="45720" tIns="27432" bIns="27432" anchor="t">
-            <a:spAutoFit/>
-          </a:bodyPr>
-          <a:lstStyle/>
-          <a:p>
-            <a:pPr algn="l">
-              <a:defRPr sz="2200" b="1">
-                <a:solidFill>
-                  <a:srgbClr val="305D9C"/>
-                </a:solidFill>
-                <a:latin typeface="Aptos"/>
-              </a:defRPr>
-            </a:pPr>
-            <a:r>
-              <a:t>•</a:t>
-            </a:r>
-          </a:p>
-        </p:txBody>
-      </p:sp>
-      <p:sp>
-        <p:nvSpPr>
-          <p:cNvPr id="13" name="TextBox 12"/>
-          <p:cNvSpPr txBox="1"/>
-          <p:nvPr/>
-        </p:nvSpPr>
-        <p:spPr>
-          <a:xfrm>
-            <a:off x="1115568" y="3328416"/>
-            <a:ext cx="10241280" cy="384048"/>
-          </a:xfrm>
-          <a:prstGeom prst="rect">
-            <a:avLst/>
-          </a:prstGeom>
-          <a:noFill/>
-        </p:spPr>
-        <p:txBody>
-          <a:bodyPr wrap="square" lIns="45720" rIns="45720" tIns="27432" bIns="27432" anchor="t">
-            <a:spAutoFit/>
-          </a:bodyPr>
-          <a:lstStyle/>
-          <a:p>
-            <a:pPr algn="l">
-              <a:defRPr sz="1800" b="0">
-                <a:solidFill>
-                  <a:srgbClr val="23272F"/>
-                </a:solidFill>
-                <a:latin typeface="Aptos"/>
-              </a:defRPr>
-            </a:pPr>
-            <a:r>
-              <a:t>Average marks for each branch.</a:t>
-            </a:r>
-          </a:p>
-        </p:txBody>
-      </p:sp>
-      <p:sp>
-        <p:nvSpPr>
-          <p:cNvPr id="14" name="TextBox 13"/>
-          <p:cNvSpPr txBox="1"/>
-          <p:nvPr/>
-        </p:nvSpPr>
-        <p:spPr>
-          <a:xfrm>
-            <a:off x="777240" y="3977640"/>
-            <a:ext cx="292608" cy="365760"/>
-          </a:xfrm>
-          <a:prstGeom prst="rect">
-            <a:avLst/>
-          </a:prstGeom>
-          <a:noFill/>
-        </p:spPr>
-        <p:txBody>
-          <a:bodyPr wrap="square" lIns="45720" rIns="45720" tIns="27432" bIns="27432" anchor="t">
-            <a:spAutoFit/>
-          </a:bodyPr>
-          <a:lstStyle/>
-          <a:p>
-            <a:pPr algn="l">
-              <a:defRPr sz="2200" b="1">
-                <a:solidFill>
-                  <a:srgbClr val="305D9C"/>
-                </a:solidFill>
-                <a:latin typeface="Aptos"/>
-              </a:defRPr>
-            </a:pPr>
-            <a:r>
-              <a:t>•</a:t>
-            </a:r>
-          </a:p>
-        </p:txBody>
-      </p:sp>
-      <p:sp>
-        <p:nvSpPr>
-          <p:cNvPr id="15" name="TextBox 14"/>
-          <p:cNvSpPr txBox="1"/>
-          <p:nvPr/>
-        </p:nvSpPr>
-        <p:spPr>
-          <a:xfrm>
-            <a:off x="1115568" y="3968496"/>
-            <a:ext cx="10241280" cy="384048"/>
-          </a:xfrm>
-          <a:prstGeom prst="rect">
-            <a:avLst/>
-          </a:prstGeom>
-          <a:noFill/>
-        </p:spPr>
-        <p:txBody>
-          <a:bodyPr wrap="square" lIns="45720" rIns="45720" tIns="27432" bIns="27432" anchor="t">
-            <a:spAutoFit/>
-          </a:bodyPr>
-          <a:lstStyle/>
-          <a:p>
-            <a:pPr algn="l">
-              <a:defRPr sz="1800" b="0">
-                <a:solidFill>
-                  <a:srgbClr val="23272F"/>
-                </a:solidFill>
-                <a:latin typeface="Aptos"/>
-              </a:defRPr>
-            </a:pPr>
-            <a:r>
-              <a:t>Number of students in each branch.</a:t>
+              <a:t>Input → processing → data/state → output</a:t>
             </a:r>
           </a:p>
         </p:txBody>
@@ -4948,7 +4078,7 @@
               </a:defRPr>
             </a:pPr>
             <a:r>
-              <a:t>Syllabus tasks</a:t>
+              <a:t>Code pathway 1</a:t>
             </a:r>
           </a:p>
         </p:txBody>
@@ -5027,21 +4157,66 @@
               </a:defRPr>
             </a:pPr>
             <a:r>
-              <a:t>Part 3</a:t>
-            </a:r>
-          </a:p>
-        </p:txBody>
-      </p:sp>
-      <p:sp>
-        <p:nvSpPr>
-          <p:cNvPr id="6" name="TextBox 5"/>
+              <a:t>queries.js • lines 1–10</a:t>
+            </a:r>
+          </a:p>
+        </p:txBody>
+      </p:sp>
+      <p:sp>
+        <p:nvSpPr>
+          <p:cNvPr id="6" name="Rounded Rectangle 5"/>
+          <p:cNvSpPr/>
+          <p:nvPr/>
+        </p:nvSpPr>
+        <p:spPr>
+          <a:xfrm>
+            <a:off x="594360" y="1298448"/>
+            <a:ext cx="10972800" cy="5074920"/>
+          </a:xfrm>
+          <a:prstGeom prst="roundRect">
+            <a:avLst/>
+          </a:prstGeom>
+          <a:solidFill>
+            <a:srgbClr val="F8FAFC"/>
+          </a:solidFill>
+          <a:ln>
+            <a:solidFill>
+              <a:srgbClr val="DCE1E8"/>
+            </a:solidFill>
+          </a:ln>
+        </p:spPr>
+        <p:style>
+          <a:lnRef idx="1">
+            <a:schemeClr val="accent1"/>
+          </a:lnRef>
+          <a:fillRef idx="3">
+            <a:schemeClr val="accent1"/>
+          </a:fillRef>
+          <a:effectRef idx="2">
+            <a:schemeClr val="accent1"/>
+          </a:effectRef>
+          <a:fontRef idx="minor">
+            <a:schemeClr val="lt1"/>
+          </a:fontRef>
+        </p:style>
+        <p:txBody>
+          <a:bodyPr rtlCol="0" anchor="ctr"/>
+          <a:lstStyle/>
+          <a:p>
+            <a:pPr algn="ctr"/>
+          </a:p>
+        </p:txBody>
+      </p:sp>
+      <p:sp>
+        <p:nvSpPr>
+          <p:cNvPr id="7" name="TextBox 6"/>
           <p:cNvSpPr txBox="1"/>
           <p:nvPr/>
         </p:nvSpPr>
         <p:spPr>
           <a:xfrm>
-            <a:off x="777240" y="1417320"/>
-            <a:ext cx="292608" cy="365760"/>
+            <a:off x="822960" y="1536192"/>
+            <a:ext cx="10515600" cy="4617720"/>
           </a:xfrm>
           <a:prstGeom prst="rect">
             <a:avLst/>
@@ -5055,123 +4230,51 @@
           <a:lstStyle/>
           <a:p>
             <a:pPr algn="l">
-              <a:defRPr sz="2200" b="1">
-                <a:solidFill>
-                  <a:srgbClr val="305D9C"/>
-                </a:solidFill>
-                <a:latin typeface="Aptos"/>
+              <a:defRPr sz="1250" b="0">
+                <a:solidFill>
+                  <a:srgbClr val="23272F"/>
+                </a:solidFill>
+                <a:latin typeface="DejaVu Sans Mono"/>
               </a:defRPr>
             </a:pPr>
             <a:r>
-              <a:t>•</a:t>
-            </a:r>
-          </a:p>
-        </p:txBody>
-      </p:sp>
-      <p:sp>
-        <p:nvSpPr>
-          <p:cNvPr id="7" name="TextBox 6"/>
-          <p:cNvSpPr txBox="1"/>
-          <p:nvPr/>
-        </p:nvSpPr>
-        <p:spPr>
-          <a:xfrm>
-            <a:off x="1115568" y="1408176"/>
-            <a:ext cx="10241280" cy="384048"/>
-          </a:xfrm>
-          <a:prstGeom prst="rect">
-            <a:avLst/>
-          </a:prstGeom>
-          <a:noFill/>
-        </p:spPr>
-        <p:txBody>
-          <a:bodyPr wrap="square" lIns="45720" rIns="45720" tIns="27432" bIns="27432" anchor="t">
-            <a:spAutoFit/>
-          </a:bodyPr>
-          <a:lstStyle/>
-          <a:p>
-            <a:pPr algn="l">
-              <a:defRPr sz="1800" b="0">
-                <a:solidFill>
-                  <a:srgbClr val="23272F"/>
-                </a:solidFill>
-                <a:latin typeface="Aptos"/>
-              </a:defRPr>
-            </a:pPr>
-            <a:r>
-              <a:t>Results ordered by average marks.</a:t>
-            </a:r>
-          </a:p>
-        </p:txBody>
-      </p:sp>
-      <p:sp>
-        <p:nvSpPr>
-          <p:cNvPr id="8" name="TextBox 7"/>
-          <p:cNvSpPr txBox="1"/>
-          <p:nvPr/>
-        </p:nvSpPr>
-        <p:spPr>
-          <a:xfrm>
-            <a:off x="777240" y="2057400"/>
-            <a:ext cx="292608" cy="365760"/>
-          </a:xfrm>
-          <a:prstGeom prst="rect">
-            <a:avLst/>
-          </a:prstGeom>
-          <a:noFill/>
-        </p:spPr>
-        <p:txBody>
-          <a:bodyPr wrap="square" lIns="45720" rIns="45720" tIns="27432" bIns="27432" anchor="t">
-            <a:spAutoFit/>
-          </a:bodyPr>
-          <a:lstStyle/>
-          <a:p>
-            <a:pPr algn="l">
-              <a:defRPr sz="2200" b="1">
-                <a:solidFill>
-                  <a:srgbClr val="305D9C"/>
-                </a:solidFill>
-                <a:latin typeface="Aptos"/>
-              </a:defRPr>
-            </a:pPr>
-            <a:r>
-              <a:t>•</a:t>
-            </a:r>
-          </a:p>
-        </p:txBody>
-      </p:sp>
-      <p:sp>
-        <p:nvSpPr>
-          <p:cNvPr id="9" name="TextBox 8"/>
-          <p:cNvSpPr txBox="1"/>
-          <p:nvPr/>
-        </p:nvSpPr>
-        <p:spPr>
-          <a:xfrm>
-            <a:off x="1115568" y="2048256"/>
-            <a:ext cx="10241280" cy="384048"/>
-          </a:xfrm>
-          <a:prstGeom prst="rect">
-            <a:avLst/>
-          </a:prstGeom>
-          <a:noFill/>
-        </p:spPr>
-        <p:txBody>
-          <a:bodyPr wrap="square" lIns="45720" rIns="45720" tIns="27432" bIns="27432" anchor="t">
-            <a:spAutoFit/>
-          </a:bodyPr>
-          <a:lstStyle/>
-          <a:p>
-            <a:pPr algn="l">
-              <a:defRPr sz="1800" b="0">
-                <a:solidFill>
-                  <a:srgbClr val="23272F"/>
-                </a:solidFill>
-                <a:latin typeface="Aptos"/>
-              </a:defRPr>
-            </a:pPr>
-            <a:r>
-              <a:t>queries.js — sectioned MongoDB commands with comments.</a:t>
+              <a:t>  1  /**</a:t>
+            </a:r>
+            <a:br/>
+            <a:r>
+              <a:t>  2   * Experiment 11: MongoDB Databases, Collections and Records.</a:t>
+            </a:r>
+            <a:br/>
+            <a:r>
+              <a:t>  3   *</a:t>
+            </a:r>
+            <a:br/>
+            <a:r>
+              <a:t>  4   * Run from repository root:</a:t>
+            </a:r>
+            <a:br/>
+            <a:r>
+              <a:t>  5   *   mongosh --file 11-mongodb-databases-collections-records/queries.js</a:t>
+            </a:r>
+            <a:br/>
+            <a:r>
+              <a:t>  6   * For Atlas:</a:t>
+            </a:r>
+            <a:br/>
+            <a:r>
+              <a:t>  7   *   mongosh "YOUR_ATLAS_URI" --file 11-mongodb-databases-collections-records/queries.js</a:t>
+            </a:r>
+            <a:br/>
+            <a:r>
+              <a:t>  8   *</a:t>
+            </a:r>
+            <a:br/>
+            <a:r>
+              <a:t>  9   * Uses the official handout's college database and eight-student dataset.</a:t>
+            </a:r>
+            <a:br/>
+            <a:r>
+              <a:t> 10   */</a:t>
             </a:r>
           </a:p>
         </p:txBody>
@@ -5268,7 +4371,7 @@
               </a:defRPr>
             </a:pPr>
             <a:r>
-              <a:t>How it works</a:t>
+              <a:t>Code pathway 2</a:t>
             </a:r>
           </a:p>
         </p:txBody>
@@ -5316,40 +4419,16 @@
           </a:p>
         </p:txBody>
       </p:sp>
-      <p:pic>
-        <p:nvPicPr>
-          <p:cNvPr id="5" name="Picture 4" descr="11_workflow.png"/>
-          <p:cNvPicPr>
-            <a:picLocks noChangeAspect="1"/>
-          </p:cNvPicPr>
-          <p:nvPr/>
-        </p:nvPicPr>
-        <p:blipFill>
-          <a:blip r:embed="rId2"/>
-          <a:stretch>
-            <a:fillRect/>
-          </a:stretch>
-        </p:blipFill>
-        <p:spPr>
-          <a:xfrm>
-            <a:off x="594360" y="1280160"/>
-            <a:ext cx="10972800" cy="5074920"/>
-          </a:xfrm>
-          <a:prstGeom prst="rect">
-            <a:avLst/>
-          </a:prstGeom>
-        </p:spPr>
-      </p:pic>
-      <p:sp>
-        <p:nvSpPr>
-          <p:cNvPr id="6" name="TextBox 5"/>
+      <p:sp>
+        <p:nvSpPr>
+          <p:cNvPr id="5" name="TextBox 4"/>
           <p:cNvSpPr txBox="1"/>
           <p:nvPr/>
         </p:nvSpPr>
         <p:spPr>
           <a:xfrm>
-            <a:off x="777240" y="6437376"/>
-            <a:ext cx="10607040" cy="228600"/>
+            <a:off x="1874519" y="356616"/>
+            <a:ext cx="9326880" cy="365760"/>
           </a:xfrm>
           <a:prstGeom prst="rect">
             <a:avLst/>
@@ -5362,8 +4441,8 @@
           </a:bodyPr>
           <a:lstStyle/>
           <a:p>
-            <a:pPr algn="ctr">
-              <a:defRPr sz="1200" b="0">
+            <a:pPr algn="l">
+              <a:defRPr sz="1300" b="0">
                 <a:solidFill>
                   <a:srgbClr val="666E7A"/>
                 </a:solidFill>
@@ -5371,7 +4450,124 @@
               </a:defRPr>
             </a:pPr>
             <a:r>
-              <a:t>Input → processing → data/state → output</a:t>
+              <a:t>queries.js • lines 11–20</a:t>
+            </a:r>
+          </a:p>
+        </p:txBody>
+      </p:sp>
+      <p:sp>
+        <p:nvSpPr>
+          <p:cNvPr id="6" name="Rounded Rectangle 5"/>
+          <p:cNvSpPr/>
+          <p:nvPr/>
+        </p:nvSpPr>
+        <p:spPr>
+          <a:xfrm>
+            <a:off x="594360" y="1298448"/>
+            <a:ext cx="10972800" cy="5074920"/>
+          </a:xfrm>
+          <a:prstGeom prst="roundRect">
+            <a:avLst/>
+          </a:prstGeom>
+          <a:solidFill>
+            <a:srgbClr val="F8FAFC"/>
+          </a:solidFill>
+          <a:ln>
+            <a:solidFill>
+              <a:srgbClr val="DCE1E8"/>
+            </a:solidFill>
+          </a:ln>
+        </p:spPr>
+        <p:style>
+          <a:lnRef idx="1">
+            <a:schemeClr val="accent1"/>
+          </a:lnRef>
+          <a:fillRef idx="3">
+            <a:schemeClr val="accent1"/>
+          </a:fillRef>
+          <a:effectRef idx="2">
+            <a:schemeClr val="accent1"/>
+          </a:effectRef>
+          <a:fontRef idx="minor">
+            <a:schemeClr val="lt1"/>
+          </a:fontRef>
+        </p:style>
+        <p:txBody>
+          <a:bodyPr rtlCol="0" anchor="ctr"/>
+          <a:lstStyle/>
+          <a:p>
+            <a:pPr algn="ctr"/>
+          </a:p>
+        </p:txBody>
+      </p:sp>
+      <p:sp>
+        <p:nvSpPr>
+          <p:cNvPr id="7" name="TextBox 6"/>
+          <p:cNvSpPr txBox="1"/>
+          <p:nvPr/>
+        </p:nvSpPr>
+        <p:spPr>
+          <a:xfrm>
+            <a:off x="822960" y="1536192"/>
+            <a:ext cx="10515600" cy="4617720"/>
+          </a:xfrm>
+          <a:prstGeom prst="rect">
+            <a:avLst/>
+          </a:prstGeom>
+          <a:noFill/>
+        </p:spPr>
+        <p:txBody>
+          <a:bodyPr wrap="square" lIns="45720" rIns="45720" tIns="27432" bIns="27432" anchor="t">
+            <a:spAutoFit/>
+          </a:bodyPr>
+          <a:lstStyle/>
+          <a:p>
+            <a:pPr algn="l">
+              <a:defRPr sz="1250" b="0">
+                <a:solidFill>
+                  <a:srgbClr val="23272F"/>
+                </a:solidFill>
+                <a:latin typeface="DejaVu Sans Mono"/>
+              </a:defRPr>
+            </a:pPr>
+            <a:r>
+              <a:t> 11  db = db.getSiblingDB('college');</a:t>
+            </a:r>
+            <a:br/>
+            <a:r>
+              <a:t> 12  </a:t>
+            </a:r>
+            <a:br/>
+            <a:r>
+              <a:t> 13  print('PART A: database is ' + db.getName());</a:t>
+            </a:r>
+            <a:br/>
+            <a:r>
+              <a:t> 14  if (!db.getCollectionNames().includes('students')) db.createCollection('students');</a:t>
+            </a:r>
+            <a:br/>
+            <a:r>
+              <a:t> 15  if (!db.getCollectionNames().includes('courses')) db.createCollection('courses');</a:t>
+            </a:r>
+            <a:br/>
+            <a:r>
+              <a:t> 16  db.faculty.updateOne(</a:t>
+            </a:r>
+            <a:br/>
+            <a:r>
+              <a:t> 17    { name: 'Dr. Rao' },</a:t>
+            </a:r>
+            <a:br/>
+            <a:r>
+              <a:t> 18    { $set: { name: 'Dr. Rao', dept: 'CSE' } },</a:t>
+            </a:r>
+            <a:br/>
+            <a:r>
+              <a:t> 19    { upsert: true }</a:t>
+            </a:r>
+            <a:br/>
+            <a:r>
+              <a:t> 20  );</a:t>
             </a:r>
           </a:p>
         </p:txBody>
@@ -5468,7 +4664,7 @@
               </a:defRPr>
             </a:pPr>
             <a:r>
-              <a:t>Code pathway 1</a:t>
+              <a:t>Runtime walkthrough</a:t>
             </a:r>
           </a:p>
         </p:txBody>
@@ -5516,16 +4712,40 @@
           </a:p>
         </p:txBody>
       </p:sp>
-      <p:sp>
-        <p:nvSpPr>
-          <p:cNvPr id="5" name="TextBox 4"/>
+      <p:pic>
+        <p:nvPicPr>
+          <p:cNvPr id="5" name="Picture 4" descr="11_runtime.png"/>
+          <p:cNvPicPr>
+            <a:picLocks noChangeAspect="1"/>
+          </p:cNvPicPr>
+          <p:nvPr/>
+        </p:nvPicPr>
+        <p:blipFill>
+          <a:blip r:embed="rId2"/>
+          <a:stretch>
+            <a:fillRect/>
+          </a:stretch>
+        </p:blipFill>
+        <p:spPr>
+          <a:xfrm>
+            <a:off x="594360" y="1280160"/>
+            <a:ext cx="10972800" cy="5074920"/>
+          </a:xfrm>
+          <a:prstGeom prst="rect">
+            <a:avLst/>
+          </a:prstGeom>
+        </p:spPr>
+      </p:pic>
+      <p:sp>
+        <p:nvSpPr>
+          <p:cNvPr id="6" name="TextBox 5"/>
           <p:cNvSpPr txBox="1"/>
           <p:nvPr/>
         </p:nvSpPr>
         <p:spPr>
           <a:xfrm>
-            <a:off x="1874519" y="356616"/>
-            <a:ext cx="9326880" cy="365760"/>
+            <a:off x="777240" y="6437376"/>
+            <a:ext cx="10607040" cy="228600"/>
           </a:xfrm>
           <a:prstGeom prst="rect">
             <a:avLst/>
@@ -5538,8 +4758,8 @@
           </a:bodyPr>
           <a:lstStyle/>
           <a:p>
-            <a:pPr algn="l">
-              <a:defRPr sz="1300" b="0">
+            <a:pPr algn="ctr">
+              <a:defRPr sz="1200" b="0">
                 <a:solidFill>
                   <a:srgbClr val="666E7A"/>
                 </a:solidFill>
@@ -5547,124 +4767,7 @@
               </a:defRPr>
             </a:pPr>
             <a:r>
-              <a:t>queries.js • lines 1–10</a:t>
-            </a:r>
-          </a:p>
-        </p:txBody>
-      </p:sp>
-      <p:sp>
-        <p:nvSpPr>
-          <p:cNvPr id="6" name="Rounded Rectangle 5"/>
-          <p:cNvSpPr/>
-          <p:nvPr/>
-        </p:nvSpPr>
-        <p:spPr>
-          <a:xfrm>
-            <a:off x="594360" y="1298448"/>
-            <a:ext cx="10972800" cy="5074920"/>
-          </a:xfrm>
-          <a:prstGeom prst="roundRect">
-            <a:avLst/>
-          </a:prstGeom>
-          <a:solidFill>
-            <a:srgbClr val="F8FAFC"/>
-          </a:solidFill>
-          <a:ln>
-            <a:solidFill>
-              <a:srgbClr val="DCE1E8"/>
-            </a:solidFill>
-          </a:ln>
-        </p:spPr>
-        <p:style>
-          <a:lnRef idx="1">
-            <a:schemeClr val="accent1"/>
-          </a:lnRef>
-          <a:fillRef idx="3">
-            <a:schemeClr val="accent1"/>
-          </a:fillRef>
-          <a:effectRef idx="2">
-            <a:schemeClr val="accent1"/>
-          </a:effectRef>
-          <a:fontRef idx="minor">
-            <a:schemeClr val="lt1"/>
-          </a:fontRef>
-        </p:style>
-        <p:txBody>
-          <a:bodyPr rtlCol="0" anchor="ctr"/>
-          <a:lstStyle/>
-          <a:p>
-            <a:pPr algn="ctr"/>
-          </a:p>
-        </p:txBody>
-      </p:sp>
-      <p:sp>
-        <p:nvSpPr>
-          <p:cNvPr id="7" name="TextBox 6"/>
-          <p:cNvSpPr txBox="1"/>
-          <p:nvPr/>
-        </p:nvSpPr>
-        <p:spPr>
-          <a:xfrm>
-            <a:off x="822960" y="1536192"/>
-            <a:ext cx="10515600" cy="4617720"/>
-          </a:xfrm>
-          <a:prstGeom prst="rect">
-            <a:avLst/>
-          </a:prstGeom>
-          <a:noFill/>
-        </p:spPr>
-        <p:txBody>
-          <a:bodyPr wrap="square" lIns="45720" rIns="45720" tIns="27432" bIns="27432" anchor="t">
-            <a:spAutoFit/>
-          </a:bodyPr>
-          <a:lstStyle/>
-          <a:p>
-            <a:pPr algn="l">
-              <a:defRPr sz="1250" b="0">
-                <a:solidFill>
-                  <a:srgbClr val="23272F"/>
-                </a:solidFill>
-                <a:latin typeface="DejaVu Sans Mono"/>
-              </a:defRPr>
-            </a:pPr>
-            <a:r>
-              <a:t>  1  /**</a:t>
-            </a:r>
-            <a:br/>
-            <a:r>
-              <a:t>  2   * Experiment 11: MongoDB Databases, Collections and Records</a:t>
-            </a:r>
-            <a:br/>
-            <a:r>
-              <a:t>  3   *</a:t>
-            </a:r>
-            <a:br/>
-            <a:r>
-              <a:t>  4   * Run this file inside mongosh.</a:t>
-            </a:r>
-            <a:br/>
-            <a:r>
-              <a:t>  5   *</a:t>
-            </a:r>
-            <a:br/>
-            <a:r>
-              <a:t>  6   * Demonstrates:</a:t>
-            </a:r>
-            <a:br/>
-            <a:r>
-              <a:t>  7   * - Database and collection creation</a:t>
-            </a:r>
-            <a:br/>
-            <a:r>
-              <a:t>  8   * - Insert many records</a:t>
-            </a:r>
-            <a:br/>
-            <a:r>
-              <a:t>  9   * - Find</a:t>
-            </a:r>
-            <a:br/>
-            <a:r>
-              <a:t> 10   * - Limit</a:t>
+              <a:t>Start → enter input → execute → observe output</a:t>
             </a:r>
           </a:p>
         </p:txBody>
@@ -5761,7 +4864,7 @@
               </a:defRPr>
             </a:pPr>
             <a:r>
-              <a:t>Code pathway 2</a:t>
+              <a:t>Expected result</a:t>
             </a:r>
           </a:p>
         </p:txBody>
@@ -5840,7 +4943,7 @@
               </a:defRPr>
             </a:pPr>
             <a:r>
-              <a:t>queries.js • lines 11–20</a:t>
+              <a:t>Experiment 11 — MongoDB Databases, Collections and Records</a:t>
             </a:r>
           </a:p>
         </p:txBody>
@@ -5853,14 +4956,14 @@
         </p:nvSpPr>
         <p:spPr>
           <a:xfrm>
-            <a:off x="594360" y="1298448"/>
-            <a:ext cx="10972800" cy="5074920"/>
+            <a:off x="685800" y="1417320"/>
+            <a:ext cx="3337560" cy="1920240"/>
           </a:xfrm>
           <a:prstGeom prst="roundRect">
             <a:avLst/>
           </a:prstGeom>
           <a:solidFill>
-            <a:srgbClr val="F8FAFC"/>
+            <a:srgbClr val="F4F6F9"/>
           </a:solidFill>
           <a:ln>
             <a:solidFill>
@@ -5898,8 +5001,8 @@
         </p:nvSpPr>
         <p:spPr>
           <a:xfrm>
-            <a:off x="822960" y="1536192"/>
-            <a:ext cx="10515600" cy="4617720"/>
+            <a:off x="886968" y="1581912"/>
+            <a:ext cx="2935224" cy="365760"/>
           </a:xfrm>
           <a:prstGeom prst="rect">
             <a:avLst/>
@@ -5913,51 +5016,537 @@
           <a:lstStyle/>
           <a:p>
             <a:pPr algn="l">
-              <a:defRPr sz="1250" b="0">
+              <a:defRPr sz="1800" b="1">
+                <a:solidFill>
+                  <a:srgbClr val="305D9C"/>
+                </a:solidFill>
+                <a:latin typeface="Aptos"/>
+              </a:defRPr>
+            </a:pPr>
+            <a:r>
+              <a:t>INPUT</a:t>
+            </a:r>
+          </a:p>
+        </p:txBody>
+      </p:sp>
+      <p:sp>
+        <p:nvSpPr>
+          <p:cNvPr id="8" name="TextBox 7"/>
+          <p:cNvSpPr txBox="1"/>
+          <p:nvPr/>
+        </p:nvSpPr>
+        <p:spPr>
+          <a:xfrm>
+            <a:off x="886968" y="2039112"/>
+            <a:ext cx="2935224" cy="1115568"/>
+          </a:xfrm>
+          <a:prstGeom prst="rect">
+            <a:avLst/>
+          </a:prstGeom>
+          <a:noFill/>
+        </p:spPr>
+        <p:txBody>
+          <a:bodyPr wrap="square" lIns="45720" rIns="45720" tIns="27432" bIns="27432" anchor="t">
+            <a:spAutoFit/>
+          </a:bodyPr>
+          <a:lstStyle/>
+          <a:p>
+            <a:pPr algn="l">
+              <a:defRPr sz="1550" b="0">
                 <a:solidFill>
                   <a:srgbClr val="23272F"/>
                 </a:solidFill>
-                <a:latin typeface="DejaVu Sans Mono"/>
+                <a:latin typeface="Aptos"/>
               </a:defRPr>
             </a:pPr>
             <a:r>
-              <a:t> 11   * - Sort</a:t>
-            </a:r>
-            <a:br/>
-            <a:r>
-              <a:t> 12   * - Index</a:t>
-            </a:r>
-            <a:br/>
-            <a:r>
-              <a:t> 13   * - Aggregation</a:t>
-            </a:r>
-            <a:br/>
-            <a:r>
-              <a:t> 14   */</a:t>
-            </a:r>
-            <a:br/>
-            <a:r>
-              <a:t> 15  </a:t>
-            </a:r>
-            <a:br/>
-            <a:r>
-              <a:t> 16  // ------------------------------------------------------------</a:t>
-            </a:r>
-            <a:br/>
-            <a:r>
-              <a:t> 17  // Database and collection</a:t>
-            </a:r>
-            <a:br/>
-            <a:r>
-              <a:t> 18  // ------------------------------------------------------------</a:t>
-            </a:r>
-            <a:br/>
-            <a:r>
-              <a:t> 19  </a:t>
-            </a:r>
-            <a:br/>
-            <a:r>
-              <a:t> 20  use fsd2records;</a:t>
+              <a:t>Enter the sample values or open the required page / route.</a:t>
+            </a:r>
+          </a:p>
+        </p:txBody>
+      </p:sp>
+      <p:sp>
+        <p:nvSpPr>
+          <p:cNvPr id="9" name="Rounded Rectangle 8"/>
+          <p:cNvSpPr/>
+          <p:nvPr/>
+        </p:nvSpPr>
+        <p:spPr>
+          <a:xfrm>
+            <a:off x="4434840" y="1417320"/>
+            <a:ext cx="3337560" cy="1920240"/>
+          </a:xfrm>
+          <a:prstGeom prst="roundRect">
+            <a:avLst/>
+          </a:prstGeom>
+          <a:solidFill>
+            <a:srgbClr val="F4F6F9"/>
+          </a:solidFill>
+          <a:ln>
+            <a:solidFill>
+              <a:srgbClr val="DCE1E8"/>
+            </a:solidFill>
+          </a:ln>
+        </p:spPr>
+        <p:style>
+          <a:lnRef idx="1">
+            <a:schemeClr val="accent1"/>
+          </a:lnRef>
+          <a:fillRef idx="3">
+            <a:schemeClr val="accent1"/>
+          </a:fillRef>
+          <a:effectRef idx="2">
+            <a:schemeClr val="accent1"/>
+          </a:effectRef>
+          <a:fontRef idx="minor">
+            <a:schemeClr val="lt1"/>
+          </a:fontRef>
+        </p:style>
+        <p:txBody>
+          <a:bodyPr rtlCol="0" anchor="ctr"/>
+          <a:lstStyle/>
+          <a:p>
+            <a:pPr algn="ctr"/>
+          </a:p>
+        </p:txBody>
+      </p:sp>
+      <p:sp>
+        <p:nvSpPr>
+          <p:cNvPr id="10" name="TextBox 9"/>
+          <p:cNvSpPr txBox="1"/>
+          <p:nvPr/>
+        </p:nvSpPr>
+        <p:spPr>
+          <a:xfrm>
+            <a:off x="4636007" y="1581912"/>
+            <a:ext cx="2935224" cy="365760"/>
+          </a:xfrm>
+          <a:prstGeom prst="rect">
+            <a:avLst/>
+          </a:prstGeom>
+          <a:noFill/>
+        </p:spPr>
+        <p:txBody>
+          <a:bodyPr wrap="square" lIns="45720" rIns="45720" tIns="27432" bIns="27432" anchor="t">
+            <a:spAutoFit/>
+          </a:bodyPr>
+          <a:lstStyle/>
+          <a:p>
+            <a:pPr algn="l">
+              <a:defRPr sz="1800" b="1">
+                <a:solidFill>
+                  <a:srgbClr val="2A7A59"/>
+                </a:solidFill>
+                <a:latin typeface="Aptos"/>
+              </a:defRPr>
+            </a:pPr>
+            <a:r>
+              <a:t>PROCESS</a:t>
+            </a:r>
+          </a:p>
+        </p:txBody>
+      </p:sp>
+      <p:sp>
+        <p:nvSpPr>
+          <p:cNvPr id="11" name="TextBox 10"/>
+          <p:cNvSpPr txBox="1"/>
+          <p:nvPr/>
+        </p:nvSpPr>
+        <p:spPr>
+          <a:xfrm>
+            <a:off x="4636007" y="2039112"/>
+            <a:ext cx="2935224" cy="1115568"/>
+          </a:xfrm>
+          <a:prstGeom prst="rect">
+            <a:avLst/>
+          </a:prstGeom>
+          <a:noFill/>
+        </p:spPr>
+        <p:txBody>
+          <a:bodyPr wrap="square" lIns="45720" rIns="45720" tIns="27432" bIns="27432" anchor="t">
+            <a:spAutoFit/>
+          </a:bodyPr>
+          <a:lstStyle/>
+          <a:p>
+            <a:pPr algn="l">
+              <a:defRPr sz="1550" b="0">
+                <a:solidFill>
+                  <a:srgbClr val="23272F"/>
+                </a:solidFill>
+                <a:latin typeface="Aptos"/>
+              </a:defRPr>
+            </a:pPr>
+            <a:r>
+              <a:t>The Express route, React component, hook, or MongoDB command performs the task.</a:t>
+            </a:r>
+          </a:p>
+        </p:txBody>
+      </p:sp>
+      <p:sp>
+        <p:nvSpPr>
+          <p:cNvPr id="12" name="Rounded Rectangle 11"/>
+          <p:cNvSpPr/>
+          <p:nvPr/>
+        </p:nvSpPr>
+        <p:spPr>
+          <a:xfrm>
+            <a:off x="8183879" y="1417320"/>
+            <a:ext cx="3337560" cy="1920240"/>
+          </a:xfrm>
+          <a:prstGeom prst="roundRect">
+            <a:avLst/>
+          </a:prstGeom>
+          <a:solidFill>
+            <a:srgbClr val="F4F6F9"/>
+          </a:solidFill>
+          <a:ln>
+            <a:solidFill>
+              <a:srgbClr val="DCE1E8"/>
+            </a:solidFill>
+          </a:ln>
+        </p:spPr>
+        <p:style>
+          <a:lnRef idx="1">
+            <a:schemeClr val="accent1"/>
+          </a:lnRef>
+          <a:fillRef idx="3">
+            <a:schemeClr val="accent1"/>
+          </a:fillRef>
+          <a:effectRef idx="2">
+            <a:schemeClr val="accent1"/>
+          </a:effectRef>
+          <a:fontRef idx="minor">
+            <a:schemeClr val="lt1"/>
+          </a:fontRef>
+        </p:style>
+        <p:txBody>
+          <a:bodyPr rtlCol="0" anchor="ctr"/>
+          <a:lstStyle/>
+          <a:p>
+            <a:pPr algn="ctr"/>
+          </a:p>
+        </p:txBody>
+      </p:sp>
+      <p:sp>
+        <p:nvSpPr>
+          <p:cNvPr id="13" name="TextBox 12"/>
+          <p:cNvSpPr txBox="1"/>
+          <p:nvPr/>
+        </p:nvSpPr>
+        <p:spPr>
+          <a:xfrm>
+            <a:off x="8385048" y="1581912"/>
+            <a:ext cx="2935224" cy="365760"/>
+          </a:xfrm>
+          <a:prstGeom prst="rect">
+            <a:avLst/>
+          </a:prstGeom>
+          <a:noFill/>
+        </p:spPr>
+        <p:txBody>
+          <a:bodyPr wrap="square" lIns="45720" rIns="45720" tIns="27432" bIns="27432" anchor="t">
+            <a:spAutoFit/>
+          </a:bodyPr>
+          <a:lstStyle/>
+          <a:p>
+            <a:pPr algn="l">
+              <a:defRPr sz="1800" b="1">
+                <a:solidFill>
+                  <a:srgbClr val="D67E2D"/>
+                </a:solidFill>
+                <a:latin typeface="Aptos"/>
+              </a:defRPr>
+            </a:pPr>
+            <a:r>
+              <a:t>OUTPUT</a:t>
+            </a:r>
+          </a:p>
+        </p:txBody>
+      </p:sp>
+      <p:sp>
+        <p:nvSpPr>
+          <p:cNvPr id="14" name="TextBox 13"/>
+          <p:cNvSpPr txBox="1"/>
+          <p:nvPr/>
+        </p:nvSpPr>
+        <p:spPr>
+          <a:xfrm>
+            <a:off x="8385048" y="2039112"/>
+            <a:ext cx="2935224" cy="1115568"/>
+          </a:xfrm>
+          <a:prstGeom prst="rect">
+            <a:avLst/>
+          </a:prstGeom>
+          <a:noFill/>
+        </p:spPr>
+        <p:txBody>
+          <a:bodyPr wrap="square" lIns="45720" rIns="45720" tIns="27432" bIns="27432" anchor="t">
+            <a:spAutoFit/>
+          </a:bodyPr>
+          <a:lstStyle/>
+          <a:p>
+            <a:pPr algn="l">
+              <a:defRPr sz="1550" b="0">
+                <a:solidFill>
+                  <a:srgbClr val="23272F"/>
+                </a:solidFill>
+                <a:latin typeface="Aptos"/>
+              </a:defRPr>
+            </a:pPr>
+            <a:r>
+              <a:t>Check the browser, terminal, API response, or database result.</a:t>
+            </a:r>
+          </a:p>
+        </p:txBody>
+      </p:sp>
+      <p:sp>
+        <p:nvSpPr>
+          <p:cNvPr id="15" name="TextBox 14"/>
+          <p:cNvSpPr txBox="1"/>
+          <p:nvPr/>
+        </p:nvSpPr>
+        <p:spPr>
+          <a:xfrm>
+            <a:off x="731520" y="3794760"/>
+            <a:ext cx="3657600" cy="411480"/>
+          </a:xfrm>
+          <a:prstGeom prst="rect">
+            <a:avLst/>
+          </a:prstGeom>
+          <a:noFill/>
+        </p:spPr>
+        <p:txBody>
+          <a:bodyPr wrap="square" lIns="45720" rIns="45720" tIns="27432" bIns="27432" anchor="t">
+            <a:spAutoFit/>
+          </a:bodyPr>
+          <a:lstStyle/>
+          <a:p>
+            <a:pPr algn="l">
+              <a:defRPr sz="2200" b="1">
+                <a:solidFill>
+                  <a:srgbClr val="1B2B4B"/>
+                </a:solidFill>
+                <a:latin typeface="Aptos"/>
+              </a:defRPr>
+            </a:pPr>
+            <a:r>
+              <a:t>Verification checklist</a:t>
+            </a:r>
+          </a:p>
+        </p:txBody>
+      </p:sp>
+      <p:sp>
+        <p:nvSpPr>
+          <p:cNvPr id="16" name="TextBox 15"/>
+          <p:cNvSpPr txBox="1"/>
+          <p:nvPr/>
+        </p:nvSpPr>
+        <p:spPr>
+          <a:xfrm>
+            <a:off x="777240" y="4370832"/>
+            <a:ext cx="292608" cy="365760"/>
+          </a:xfrm>
+          <a:prstGeom prst="rect">
+            <a:avLst/>
+          </a:prstGeom>
+          <a:noFill/>
+        </p:spPr>
+        <p:txBody>
+          <a:bodyPr wrap="square" lIns="45720" rIns="45720" tIns="27432" bIns="27432" anchor="t">
+            <a:spAutoFit/>
+          </a:bodyPr>
+          <a:lstStyle/>
+          <a:p>
+            <a:pPr algn="l">
+              <a:defRPr sz="2200" b="1">
+                <a:solidFill>
+                  <a:srgbClr val="305D9C"/>
+                </a:solidFill>
+                <a:latin typeface="Aptos"/>
+              </a:defRPr>
+            </a:pPr>
+            <a:r>
+              <a:t>•</a:t>
+            </a:r>
+          </a:p>
+        </p:txBody>
+      </p:sp>
+      <p:sp>
+        <p:nvSpPr>
+          <p:cNvPr id="17" name="TextBox 16"/>
+          <p:cNvSpPr txBox="1"/>
+          <p:nvPr/>
+        </p:nvSpPr>
+        <p:spPr>
+          <a:xfrm>
+            <a:off x="1115568" y="4361688"/>
+            <a:ext cx="10241280" cy="384048"/>
+          </a:xfrm>
+          <a:prstGeom prst="rect">
+            <a:avLst/>
+          </a:prstGeom>
+          <a:noFill/>
+        </p:spPr>
+        <p:txBody>
+          <a:bodyPr wrap="square" lIns="45720" rIns="45720" tIns="27432" bIns="27432" anchor="t">
+            <a:spAutoFit/>
+          </a:bodyPr>
+          <a:lstStyle/>
+          <a:p>
+            <a:pPr algn="l">
+              <a:defRPr sz="1700" b="0">
+                <a:solidFill>
+                  <a:srgbClr val="23272F"/>
+                </a:solidFill>
+                <a:latin typeface="Aptos"/>
+              </a:defRPr>
+            </a:pPr>
+            <a:r>
+              <a:t>No syntax errors appear in the terminal.</a:t>
+            </a:r>
+          </a:p>
+        </p:txBody>
+      </p:sp>
+      <p:sp>
+        <p:nvSpPr>
+          <p:cNvPr id="18" name="TextBox 17"/>
+          <p:cNvSpPr txBox="1"/>
+          <p:nvPr/>
+        </p:nvSpPr>
+        <p:spPr>
+          <a:xfrm>
+            <a:off x="777240" y="5010912"/>
+            <a:ext cx="292608" cy="365760"/>
+          </a:xfrm>
+          <a:prstGeom prst="rect">
+            <a:avLst/>
+          </a:prstGeom>
+          <a:noFill/>
+        </p:spPr>
+        <p:txBody>
+          <a:bodyPr wrap="square" lIns="45720" rIns="45720" tIns="27432" bIns="27432" anchor="t">
+            <a:spAutoFit/>
+          </a:bodyPr>
+          <a:lstStyle/>
+          <a:p>
+            <a:pPr algn="l">
+              <a:defRPr sz="2200" b="1">
+                <a:solidFill>
+                  <a:srgbClr val="305D9C"/>
+                </a:solidFill>
+                <a:latin typeface="Aptos"/>
+              </a:defRPr>
+            </a:pPr>
+            <a:r>
+              <a:t>•</a:t>
+            </a:r>
+          </a:p>
+        </p:txBody>
+      </p:sp>
+      <p:sp>
+        <p:nvSpPr>
+          <p:cNvPr id="19" name="TextBox 18"/>
+          <p:cNvSpPr txBox="1"/>
+          <p:nvPr/>
+        </p:nvSpPr>
+        <p:spPr>
+          <a:xfrm>
+            <a:off x="1115568" y="5001768"/>
+            <a:ext cx="10241280" cy="384048"/>
+          </a:xfrm>
+          <a:prstGeom prst="rect">
+            <a:avLst/>
+          </a:prstGeom>
+          <a:noFill/>
+        </p:spPr>
+        <p:txBody>
+          <a:bodyPr wrap="square" lIns="45720" rIns="45720" tIns="27432" bIns="27432" anchor="t">
+            <a:spAutoFit/>
+          </a:bodyPr>
+          <a:lstStyle/>
+          <a:p>
+            <a:pPr algn="l">
+              <a:defRPr sz="1700" b="0">
+                <a:solidFill>
+                  <a:srgbClr val="23272F"/>
+                </a:solidFill>
+                <a:latin typeface="Aptos"/>
+              </a:defRPr>
+            </a:pPr>
+            <a:r>
+              <a:t>The requested feature responds to the input.</a:t>
+            </a:r>
+          </a:p>
+        </p:txBody>
+      </p:sp>
+      <p:sp>
+        <p:nvSpPr>
+          <p:cNvPr id="20" name="TextBox 19"/>
+          <p:cNvSpPr txBox="1"/>
+          <p:nvPr/>
+        </p:nvSpPr>
+        <p:spPr>
+          <a:xfrm>
+            <a:off x="777240" y="5650992"/>
+            <a:ext cx="292608" cy="365760"/>
+          </a:xfrm>
+          <a:prstGeom prst="rect">
+            <a:avLst/>
+          </a:prstGeom>
+          <a:noFill/>
+        </p:spPr>
+        <p:txBody>
+          <a:bodyPr wrap="square" lIns="45720" rIns="45720" tIns="27432" bIns="27432" anchor="t">
+            <a:spAutoFit/>
+          </a:bodyPr>
+          <a:lstStyle/>
+          <a:p>
+            <a:pPr algn="l">
+              <a:defRPr sz="2200" b="1">
+                <a:solidFill>
+                  <a:srgbClr val="305D9C"/>
+                </a:solidFill>
+                <a:latin typeface="Aptos"/>
+              </a:defRPr>
+            </a:pPr>
+            <a:r>
+              <a:t>•</a:t>
+            </a:r>
+          </a:p>
+        </p:txBody>
+      </p:sp>
+      <p:sp>
+        <p:nvSpPr>
+          <p:cNvPr id="21" name="TextBox 20"/>
+          <p:cNvSpPr txBox="1"/>
+          <p:nvPr/>
+        </p:nvSpPr>
+        <p:spPr>
+          <a:xfrm>
+            <a:off x="1115568" y="5641848"/>
+            <a:ext cx="10241280" cy="384048"/>
+          </a:xfrm>
+          <a:prstGeom prst="rect">
+            <a:avLst/>
+          </a:prstGeom>
+          <a:noFill/>
+        </p:spPr>
+        <p:txBody>
+          <a:bodyPr wrap="square" lIns="45720" rIns="45720" tIns="27432" bIns="27432" anchor="t">
+            <a:spAutoFit/>
+          </a:bodyPr>
+          <a:lstStyle/>
+          <a:p>
+            <a:pPr algn="l">
+              <a:defRPr sz="1700" b="0">
+                <a:solidFill>
+                  <a:srgbClr val="23272F"/>
+                </a:solidFill>
+                <a:latin typeface="Aptos"/>
+              </a:defRPr>
+            </a:pPr>
+            <a:r>
+              <a:t>The displayed / returned value matches the operation.</a:t>
             </a:r>
           </a:p>
         </p:txBody>
@@ -6054,7 +5643,7 @@
               </a:defRPr>
             </a:pPr>
             <a:r>
-              <a:t>Runtime walkthrough</a:t>
+              <a:t>Viva preparation</a:t>
             </a:r>
           </a:p>
         </p:txBody>
@@ -6102,40 +5691,16 @@
           </a:p>
         </p:txBody>
       </p:sp>
-      <p:pic>
-        <p:nvPicPr>
-          <p:cNvPr id="5" name="Picture 4" descr="11_runtime.png"/>
-          <p:cNvPicPr>
-            <a:picLocks noChangeAspect="1"/>
-          </p:cNvPicPr>
-          <p:nvPr/>
-        </p:nvPicPr>
-        <p:blipFill>
-          <a:blip r:embed="rId2"/>
-          <a:stretch>
-            <a:fillRect/>
-          </a:stretch>
-        </p:blipFill>
-        <p:spPr>
-          <a:xfrm>
-            <a:off x="594360" y="1280160"/>
-            <a:ext cx="10972800" cy="5074920"/>
-          </a:xfrm>
-          <a:prstGeom prst="rect">
-            <a:avLst/>
-          </a:prstGeom>
-        </p:spPr>
-      </p:pic>
-      <p:sp>
-        <p:nvSpPr>
-          <p:cNvPr id="6" name="TextBox 5"/>
+      <p:sp>
+        <p:nvSpPr>
+          <p:cNvPr id="5" name="TextBox 4"/>
           <p:cNvSpPr txBox="1"/>
           <p:nvPr/>
         </p:nvSpPr>
         <p:spPr>
           <a:xfrm>
-            <a:off x="777240" y="6437376"/>
-            <a:ext cx="10607040" cy="228600"/>
+            <a:off x="777240" y="1417320"/>
+            <a:ext cx="292608" cy="365760"/>
           </a:xfrm>
           <a:prstGeom prst="rect">
             <a:avLst/>
@@ -6148,170 +5713,30 @@
           </a:bodyPr>
           <a:lstStyle/>
           <a:p>
-            <a:pPr algn="ctr">
-              <a:defRPr sz="1200" b="0">
-                <a:solidFill>
-                  <a:srgbClr val="666E7A"/>
+            <a:pPr algn="l">
+              <a:defRPr sz="2200" b="1">
+                <a:solidFill>
+                  <a:srgbClr val="305D9C"/>
                 </a:solidFill>
                 <a:latin typeface="Aptos"/>
               </a:defRPr>
             </a:pPr>
             <a:r>
-              <a:t>Start → enter input → execute → observe output</a:t>
-            </a:r>
-          </a:p>
-        </p:txBody>
-      </p:sp>
-    </p:spTree>
-  </p:cSld>
-  <p:clrMapOvr>
-    <a:masterClrMapping/>
-  </p:clrMapOvr>
-</p:sld>
-</file>
-
-<file path=ppt/slides/slide9.xml><?xml version="1.0" encoding="utf-8"?>
-<p:sld xmlns:a="http://schemas.openxmlformats.org/drawingml/2006/main" xmlns:p="http://schemas.openxmlformats.org/presentationml/2006/main" xmlns:r="http://schemas.openxmlformats.org/officeDocument/2006/relationships">
-  <p:cSld>
-    <p:spTree>
-      <p:nvGrpSpPr>
-        <p:cNvPr id="1" name=""/>
-        <p:cNvGrpSpPr/>
-        <p:nvPr/>
-      </p:nvGrpSpPr>
-      <p:grpSpPr/>
-      <p:sp>
-        <p:nvSpPr>
-          <p:cNvPr id="2" name="Rectangle 1"/>
-          <p:cNvSpPr/>
-          <p:nvPr/>
-        </p:nvSpPr>
-        <p:spPr>
-          <a:xfrm>
-            <a:off x="0" y="0"/>
-            <a:ext cx="12191695" cy="6858000"/>
-          </a:xfrm>
-          <a:prstGeom prst="rect">
-            <a:avLst/>
-          </a:prstGeom>
-          <a:solidFill>
-            <a:srgbClr val="FFFFFF"/>
-          </a:solidFill>
-          <a:ln>
-            <a:noFill/>
-          </a:ln>
-        </p:spPr>
-        <p:style>
-          <a:lnRef idx="1">
-            <a:schemeClr val="accent1"/>
-          </a:lnRef>
-          <a:fillRef idx="3">
-            <a:schemeClr val="accent1"/>
-          </a:fillRef>
-          <a:effectRef idx="2">
-            <a:schemeClr val="accent1"/>
-          </a:effectRef>
-          <a:fontRef idx="minor">
-            <a:schemeClr val="lt1"/>
-          </a:fontRef>
-        </p:style>
-        <p:txBody>
-          <a:bodyPr rtlCol="0" anchor="ctr"/>
-          <a:lstStyle/>
-          <a:p>
-            <a:pPr algn="ctr"/>
-          </a:p>
-        </p:txBody>
-      </p:sp>
-      <p:sp>
-        <p:nvSpPr>
-          <p:cNvPr id="3" name="TextBox 2"/>
+              <a:t>•</a:t>
+            </a:r>
+          </a:p>
+        </p:txBody>
+      </p:sp>
+      <p:sp>
+        <p:nvSpPr>
+          <p:cNvPr id="6" name="TextBox 5"/>
           <p:cNvSpPr txBox="1"/>
           <p:nvPr/>
         </p:nvSpPr>
         <p:spPr>
           <a:xfrm>
-            <a:off x="594360" y="274320"/>
-            <a:ext cx="10927080" cy="621792"/>
-          </a:xfrm>
-          <a:prstGeom prst="rect">
-            <a:avLst/>
-          </a:prstGeom>
-          <a:noFill/>
-        </p:spPr>
-        <p:txBody>
-          <a:bodyPr wrap="square" lIns="45720" rIns="45720" tIns="27432" bIns="27432" anchor="ctr">
-            <a:spAutoFit/>
-          </a:bodyPr>
-          <a:lstStyle/>
-          <a:p>
-            <a:pPr algn="l">
-              <a:defRPr sz="2700" b="1">
-                <a:solidFill>
-                  <a:srgbClr val="1B2B4B"/>
-                </a:solidFill>
-                <a:latin typeface="Aptos"/>
-              </a:defRPr>
-            </a:pPr>
-            <a:r>
-              <a:t>Expected result</a:t>
-            </a:r>
-          </a:p>
-        </p:txBody>
-      </p:sp>
-      <p:sp>
-        <p:nvSpPr>
-          <p:cNvPr id="4" name="Rectangle 3"/>
-          <p:cNvSpPr/>
-          <p:nvPr/>
-        </p:nvSpPr>
-        <p:spPr>
-          <a:xfrm>
-            <a:off x="594360" y="950976"/>
-            <a:ext cx="1143000" cy="54864"/>
-          </a:xfrm>
-          <a:prstGeom prst="rect">
-            <a:avLst/>
-          </a:prstGeom>
-          <a:solidFill>
-            <a:srgbClr val="305D9C"/>
-          </a:solidFill>
-          <a:ln>
-            <a:noFill/>
-          </a:ln>
-        </p:spPr>
-        <p:style>
-          <a:lnRef idx="1">
-            <a:schemeClr val="accent1"/>
-          </a:lnRef>
-          <a:fillRef idx="3">
-            <a:schemeClr val="accent1"/>
-          </a:fillRef>
-          <a:effectRef idx="2">
-            <a:schemeClr val="accent1"/>
-          </a:effectRef>
-          <a:fontRef idx="minor">
-            <a:schemeClr val="lt1"/>
-          </a:fontRef>
-        </p:style>
-        <p:txBody>
-          <a:bodyPr rtlCol="0" anchor="ctr"/>
-          <a:lstStyle/>
-          <a:p>
-            <a:pPr algn="ctr"/>
-          </a:p>
-        </p:txBody>
-      </p:sp>
-      <p:sp>
-        <p:nvSpPr>
-          <p:cNvPr id="5" name="TextBox 4"/>
-          <p:cNvSpPr txBox="1"/>
-          <p:nvPr/>
-        </p:nvSpPr>
-        <p:spPr>
-          <a:xfrm>
-            <a:off x="1874519" y="356616"/>
-            <a:ext cx="9326880" cy="365760"/>
+            <a:off x="1115568" y="1408176"/>
+            <a:ext cx="10241280" cy="384048"/>
           </a:xfrm>
           <a:prstGeom prst="rect">
             <a:avLst/>
@@ -6325,61 +5750,16 @@
           <a:lstStyle/>
           <a:p>
             <a:pPr algn="l">
-              <a:defRPr sz="1300" b="0">
-                <a:solidFill>
-                  <a:srgbClr val="666E7A"/>
+              <a:defRPr sz="1800" b="0">
+                <a:solidFill>
+                  <a:srgbClr val="23272F"/>
                 </a:solidFill>
                 <a:latin typeface="Aptos"/>
               </a:defRPr>
             </a:pPr>
             <a:r>
-              <a:t>Experiment 11 — MongoDB Databases, Collections and Records</a:t>
-            </a:r>
-          </a:p>
-        </p:txBody>
-      </p:sp>
-      <p:sp>
-        <p:nvSpPr>
-          <p:cNvPr id="6" name="Rounded Rectangle 5"/>
-          <p:cNvSpPr/>
-          <p:nvPr/>
-        </p:nvSpPr>
-        <p:spPr>
-          <a:xfrm>
-            <a:off x="685800" y="1417320"/>
-            <a:ext cx="3337560" cy="1920240"/>
-          </a:xfrm>
-          <a:prstGeom prst="roundRect">
-            <a:avLst/>
-          </a:prstGeom>
-          <a:solidFill>
-            <a:srgbClr val="F4F6F9"/>
-          </a:solidFill>
-          <a:ln>
-            <a:solidFill>
-              <a:srgbClr val="DCE1E8"/>
-            </a:solidFill>
-          </a:ln>
-        </p:spPr>
-        <p:style>
-          <a:lnRef idx="1">
-            <a:schemeClr val="accent1"/>
-          </a:lnRef>
-          <a:fillRef idx="3">
-            <a:schemeClr val="accent1"/>
-          </a:fillRef>
-          <a:effectRef idx="2">
-            <a:schemeClr val="accent1"/>
-          </a:effectRef>
-          <a:fontRef idx="minor">
-            <a:schemeClr val="lt1"/>
-          </a:fontRef>
-        </p:style>
-        <p:txBody>
-          <a:bodyPr rtlCol="0" anchor="ctr"/>
-          <a:lstStyle/>
-          <a:p>
-            <a:pPr algn="ctr"/>
+              <a:t>What is the purpose of this experiment?</a:t>
+            </a:r>
           </a:p>
         </p:txBody>
       </p:sp>
@@ -6391,8 +5771,8 @@
         </p:nvSpPr>
         <p:spPr>
           <a:xfrm>
-            <a:off x="886968" y="1581912"/>
-            <a:ext cx="2935224" cy="365760"/>
+            <a:off x="777240" y="2057400"/>
+            <a:ext cx="292608" cy="365760"/>
           </a:xfrm>
           <a:prstGeom prst="rect">
             <a:avLst/>
@@ -6406,7 +5786,7 @@
           <a:lstStyle/>
           <a:p>
             <a:pPr algn="l">
-              <a:defRPr sz="1800" b="1">
+              <a:defRPr sz="2200" b="1">
                 <a:solidFill>
                   <a:srgbClr val="305D9C"/>
                 </a:solidFill>
@@ -6414,7 +5794,7 @@
               </a:defRPr>
             </a:pPr>
             <a:r>
-              <a:t>INPUT</a:t>
+              <a:t>•</a:t>
             </a:r>
           </a:p>
         </p:txBody>
@@ -6427,8 +5807,8 @@
         </p:nvSpPr>
         <p:spPr>
           <a:xfrm>
-            <a:off x="886968" y="2039112"/>
-            <a:ext cx="2935224" cy="1115568"/>
+            <a:off x="1115568" y="2048256"/>
+            <a:ext cx="10241280" cy="384048"/>
           </a:xfrm>
           <a:prstGeom prst="rect">
             <a:avLst/>
@@ -6442,7 +5822,7 @@
           <a:lstStyle/>
           <a:p>
             <a:pPr algn="l">
-              <a:defRPr sz="1550" b="0">
+              <a:defRPr sz="1800" b="0">
                 <a:solidFill>
                   <a:srgbClr val="23272F"/>
                 </a:solidFill>
@@ -6450,66 +5830,21 @@
               </a:defRPr>
             </a:pPr>
             <a:r>
-              <a:t>Enter the sample values or open the required page / route.</a:t>
-            </a:r>
-          </a:p>
-        </p:txBody>
-      </p:sp>
-      <p:sp>
-        <p:nvSpPr>
-          <p:cNvPr id="9" name="Rounded Rectangle 8"/>
-          <p:cNvSpPr/>
-          <p:nvPr/>
-        </p:nvSpPr>
-        <p:spPr>
-          <a:xfrm>
-            <a:off x="4434840" y="1417320"/>
-            <a:ext cx="3337560" cy="1920240"/>
-          </a:xfrm>
-          <a:prstGeom prst="roundRect">
-            <a:avLst/>
-          </a:prstGeom>
-          <a:solidFill>
-            <a:srgbClr val="F4F6F9"/>
-          </a:solidFill>
-          <a:ln>
-            <a:solidFill>
-              <a:srgbClr val="DCE1E8"/>
-            </a:solidFill>
-          </a:ln>
-        </p:spPr>
-        <p:style>
-          <a:lnRef idx="1">
-            <a:schemeClr val="accent1"/>
-          </a:lnRef>
-          <a:fillRef idx="3">
-            <a:schemeClr val="accent1"/>
-          </a:fillRef>
-          <a:effectRef idx="2">
-            <a:schemeClr val="accent1"/>
-          </a:effectRef>
-          <a:fontRef idx="minor">
-            <a:schemeClr val="lt1"/>
-          </a:fontRef>
-        </p:style>
-        <p:txBody>
-          <a:bodyPr rtlCol="0" anchor="ctr"/>
-          <a:lstStyle/>
-          <a:p>
-            <a:pPr algn="ctr"/>
-          </a:p>
-        </p:txBody>
-      </p:sp>
-      <p:sp>
-        <p:nvSpPr>
-          <p:cNvPr id="10" name="TextBox 9"/>
+              <a:t>Which input is required?</a:t>
+            </a:r>
+          </a:p>
+        </p:txBody>
+      </p:sp>
+      <p:sp>
+        <p:nvSpPr>
+          <p:cNvPr id="9" name="TextBox 8"/>
           <p:cNvSpPr txBox="1"/>
           <p:nvPr/>
         </p:nvSpPr>
         <p:spPr>
           <a:xfrm>
-            <a:off x="4636007" y="1581912"/>
-            <a:ext cx="2935224" cy="365760"/>
+            <a:off x="777240" y="2697480"/>
+            <a:ext cx="292608" cy="365760"/>
           </a:xfrm>
           <a:prstGeom prst="rect">
             <a:avLst/>
@@ -6523,29 +5858,29 @@
           <a:lstStyle/>
           <a:p>
             <a:pPr algn="l">
-              <a:defRPr sz="1800" b="1">
-                <a:solidFill>
-                  <a:srgbClr val="2A7A59"/>
+              <a:defRPr sz="2200" b="1">
+                <a:solidFill>
+                  <a:srgbClr val="305D9C"/>
                 </a:solidFill>
                 <a:latin typeface="Aptos"/>
               </a:defRPr>
             </a:pPr>
             <a:r>
-              <a:t>PROCESS</a:t>
-            </a:r>
-          </a:p>
-        </p:txBody>
-      </p:sp>
-      <p:sp>
-        <p:nvSpPr>
-          <p:cNvPr id="11" name="TextBox 10"/>
+              <a:t>•</a:t>
+            </a:r>
+          </a:p>
+        </p:txBody>
+      </p:sp>
+      <p:sp>
+        <p:nvSpPr>
+          <p:cNvPr id="10" name="TextBox 9"/>
           <p:cNvSpPr txBox="1"/>
           <p:nvPr/>
         </p:nvSpPr>
         <p:spPr>
           <a:xfrm>
-            <a:off x="4636007" y="2039112"/>
-            <a:ext cx="2935224" cy="1115568"/>
+            <a:off x="1115568" y="2688336"/>
+            <a:ext cx="10241280" cy="384048"/>
           </a:xfrm>
           <a:prstGeom prst="rect">
             <a:avLst/>
@@ -6559,7 +5894,7 @@
           <a:lstStyle/>
           <a:p>
             <a:pPr algn="l">
-              <a:defRPr sz="1550" b="0">
+              <a:defRPr sz="1800" b="0">
                 <a:solidFill>
                   <a:srgbClr val="23272F"/>
                 </a:solidFill>
@@ -6567,66 +5902,21 @@
               </a:defRPr>
             </a:pPr>
             <a:r>
-              <a:t>The Express route, React component, hook, or MongoDB command performs the task.</a:t>
-            </a:r>
-          </a:p>
-        </p:txBody>
-      </p:sp>
-      <p:sp>
-        <p:nvSpPr>
-          <p:cNvPr id="12" name="Rounded Rectangle 11"/>
-          <p:cNvSpPr/>
-          <p:nvPr/>
-        </p:nvSpPr>
-        <p:spPr>
-          <a:xfrm>
-            <a:off x="8183879" y="1417320"/>
-            <a:ext cx="3337560" cy="1920240"/>
-          </a:xfrm>
-          <a:prstGeom prst="roundRect">
-            <a:avLst/>
-          </a:prstGeom>
-          <a:solidFill>
-            <a:srgbClr val="F4F6F9"/>
-          </a:solidFill>
-          <a:ln>
-            <a:solidFill>
-              <a:srgbClr val="DCE1E8"/>
-            </a:solidFill>
-          </a:ln>
-        </p:spPr>
-        <p:style>
-          <a:lnRef idx="1">
-            <a:schemeClr val="accent1"/>
-          </a:lnRef>
-          <a:fillRef idx="3">
-            <a:schemeClr val="accent1"/>
-          </a:fillRef>
-          <a:effectRef idx="2">
-            <a:schemeClr val="accent1"/>
-          </a:effectRef>
-          <a:fontRef idx="minor">
-            <a:schemeClr val="lt1"/>
-          </a:fontRef>
-        </p:style>
-        <p:txBody>
-          <a:bodyPr rtlCol="0" anchor="ctr"/>
-          <a:lstStyle/>
-          <a:p>
-            <a:pPr algn="ctr"/>
-          </a:p>
-        </p:txBody>
-      </p:sp>
-      <p:sp>
-        <p:nvSpPr>
-          <p:cNvPr id="13" name="TextBox 12"/>
+              <a:t>Which line or command performs the main operation?</a:t>
+            </a:r>
+          </a:p>
+        </p:txBody>
+      </p:sp>
+      <p:sp>
+        <p:nvSpPr>
+          <p:cNvPr id="11" name="TextBox 10"/>
           <p:cNvSpPr txBox="1"/>
           <p:nvPr/>
         </p:nvSpPr>
         <p:spPr>
           <a:xfrm>
-            <a:off x="8385048" y="1581912"/>
-            <a:ext cx="2935224" cy="365760"/>
+            <a:off x="777240" y="3337560"/>
+            <a:ext cx="292608" cy="365760"/>
           </a:xfrm>
           <a:prstGeom prst="rect">
             <a:avLst/>
@@ -6640,29 +5930,29 @@
           <a:lstStyle/>
           <a:p>
             <a:pPr algn="l">
-              <a:defRPr sz="1800" b="1">
-                <a:solidFill>
-                  <a:srgbClr val="D67E2D"/>
+              <a:defRPr sz="2200" b="1">
+                <a:solidFill>
+                  <a:srgbClr val="305D9C"/>
                 </a:solidFill>
                 <a:latin typeface="Aptos"/>
               </a:defRPr>
             </a:pPr>
             <a:r>
-              <a:t>OUTPUT</a:t>
-            </a:r>
-          </a:p>
-        </p:txBody>
-      </p:sp>
-      <p:sp>
-        <p:nvSpPr>
-          <p:cNvPr id="14" name="TextBox 13"/>
+              <a:t>•</a:t>
+            </a:r>
+          </a:p>
+        </p:txBody>
+      </p:sp>
+      <p:sp>
+        <p:nvSpPr>
+          <p:cNvPr id="12" name="TextBox 11"/>
           <p:cNvSpPr txBox="1"/>
           <p:nvPr/>
         </p:nvSpPr>
         <p:spPr>
           <a:xfrm>
-            <a:off x="8385048" y="2039112"/>
-            <a:ext cx="2935224" cy="1115568"/>
+            <a:off x="1115568" y="3328416"/>
+            <a:ext cx="10241280" cy="384048"/>
           </a:xfrm>
           <a:prstGeom prst="rect">
             <a:avLst/>
@@ -6676,7 +5966,7 @@
           <a:lstStyle/>
           <a:p>
             <a:pPr algn="l">
-              <a:defRPr sz="1550" b="0">
+              <a:defRPr sz="1800" b="0">
                 <a:solidFill>
                   <a:srgbClr val="23272F"/>
                 </a:solidFill>
@@ -6684,21 +5974,21 @@
               </a:defRPr>
             </a:pPr>
             <a:r>
-              <a:t>Check the browser, terminal, API response, or database result.</a:t>
-            </a:r>
-          </a:p>
-        </p:txBody>
-      </p:sp>
-      <p:sp>
-        <p:nvSpPr>
-          <p:cNvPr id="15" name="TextBox 14"/>
+              <a:t>What output should you observe?</a:t>
+            </a:r>
+          </a:p>
+        </p:txBody>
+      </p:sp>
+      <p:sp>
+        <p:nvSpPr>
+          <p:cNvPr id="13" name="TextBox 12"/>
           <p:cNvSpPr txBox="1"/>
           <p:nvPr/>
         </p:nvSpPr>
         <p:spPr>
           <a:xfrm>
-            <a:off x="731520" y="3794760"/>
-            <a:ext cx="3657600" cy="411480"/>
+            <a:off x="777240" y="3977640"/>
+            <a:ext cx="292608" cy="365760"/>
           </a:xfrm>
           <a:prstGeom prst="rect">
             <a:avLst/>
@@ -6714,27 +6004,27 @@
             <a:pPr algn="l">
               <a:defRPr sz="2200" b="1">
                 <a:solidFill>
-                  <a:srgbClr val="1B2B4B"/>
+                  <a:srgbClr val="305D9C"/>
                 </a:solidFill>
                 <a:latin typeface="Aptos"/>
               </a:defRPr>
             </a:pPr>
             <a:r>
-              <a:t>Verification checklist</a:t>
-            </a:r>
-          </a:p>
-        </p:txBody>
-      </p:sp>
-      <p:sp>
-        <p:nvSpPr>
-          <p:cNvPr id="16" name="TextBox 15"/>
+              <a:t>•</a:t>
+            </a:r>
+          </a:p>
+        </p:txBody>
+      </p:sp>
+      <p:sp>
+        <p:nvSpPr>
+          <p:cNvPr id="14" name="TextBox 13"/>
           <p:cNvSpPr txBox="1"/>
           <p:nvPr/>
         </p:nvSpPr>
         <p:spPr>
           <a:xfrm>
-            <a:off x="777240" y="4370832"/>
-            <a:ext cx="292608" cy="365760"/>
+            <a:off x="1115568" y="3968496"/>
+            <a:ext cx="10241280" cy="384048"/>
           </a:xfrm>
           <a:prstGeom prst="rect">
             <a:avLst/>
@@ -6748,195 +6038,15 @@
           <a:lstStyle/>
           <a:p>
             <a:pPr algn="l">
-              <a:defRPr sz="2200" b="1">
-                <a:solidFill>
-                  <a:srgbClr val="305D9C"/>
+              <a:defRPr sz="1800" b="0">
+                <a:solidFill>
+                  <a:srgbClr val="23272F"/>
                 </a:solidFill>
                 <a:latin typeface="Aptos"/>
               </a:defRPr>
             </a:pPr>
             <a:r>
-              <a:t>•</a:t>
-            </a:r>
-          </a:p>
-        </p:txBody>
-      </p:sp>
-      <p:sp>
-        <p:nvSpPr>
-          <p:cNvPr id="17" name="TextBox 16"/>
-          <p:cNvSpPr txBox="1"/>
-          <p:nvPr/>
-        </p:nvSpPr>
-        <p:spPr>
-          <a:xfrm>
-            <a:off x="1115568" y="4361688"/>
-            <a:ext cx="10241280" cy="384048"/>
-          </a:xfrm>
-          <a:prstGeom prst="rect">
-            <a:avLst/>
-          </a:prstGeom>
-          <a:noFill/>
-        </p:spPr>
-        <p:txBody>
-          <a:bodyPr wrap="square" lIns="45720" rIns="45720" tIns="27432" bIns="27432" anchor="t">
-            <a:spAutoFit/>
-          </a:bodyPr>
-          <a:lstStyle/>
-          <a:p>
-            <a:pPr algn="l">
-              <a:defRPr sz="1700" b="0">
-                <a:solidFill>
-                  <a:srgbClr val="23272F"/>
-                </a:solidFill>
-                <a:latin typeface="Aptos"/>
-              </a:defRPr>
-            </a:pPr>
-            <a:r>
-              <a:t>No syntax errors appear in the terminal.</a:t>
-            </a:r>
-          </a:p>
-        </p:txBody>
-      </p:sp>
-      <p:sp>
-        <p:nvSpPr>
-          <p:cNvPr id="18" name="TextBox 17"/>
-          <p:cNvSpPr txBox="1"/>
-          <p:nvPr/>
-        </p:nvSpPr>
-        <p:spPr>
-          <a:xfrm>
-            <a:off x="777240" y="5010912"/>
-            <a:ext cx="292608" cy="365760"/>
-          </a:xfrm>
-          <a:prstGeom prst="rect">
-            <a:avLst/>
-          </a:prstGeom>
-          <a:noFill/>
-        </p:spPr>
-        <p:txBody>
-          <a:bodyPr wrap="square" lIns="45720" rIns="45720" tIns="27432" bIns="27432" anchor="t">
-            <a:spAutoFit/>
-          </a:bodyPr>
-          <a:lstStyle/>
-          <a:p>
-            <a:pPr algn="l">
-              <a:defRPr sz="2200" b="1">
-                <a:solidFill>
-                  <a:srgbClr val="305D9C"/>
-                </a:solidFill>
-                <a:latin typeface="Aptos"/>
-              </a:defRPr>
-            </a:pPr>
-            <a:r>
-              <a:t>•</a:t>
-            </a:r>
-          </a:p>
-        </p:txBody>
-      </p:sp>
-      <p:sp>
-        <p:nvSpPr>
-          <p:cNvPr id="19" name="TextBox 18"/>
-          <p:cNvSpPr txBox="1"/>
-          <p:nvPr/>
-        </p:nvSpPr>
-        <p:spPr>
-          <a:xfrm>
-            <a:off x="1115568" y="5001768"/>
-            <a:ext cx="10241280" cy="384048"/>
-          </a:xfrm>
-          <a:prstGeom prst="rect">
-            <a:avLst/>
-          </a:prstGeom>
-          <a:noFill/>
-        </p:spPr>
-        <p:txBody>
-          <a:bodyPr wrap="square" lIns="45720" rIns="45720" tIns="27432" bIns="27432" anchor="t">
-            <a:spAutoFit/>
-          </a:bodyPr>
-          <a:lstStyle/>
-          <a:p>
-            <a:pPr algn="l">
-              <a:defRPr sz="1700" b="0">
-                <a:solidFill>
-                  <a:srgbClr val="23272F"/>
-                </a:solidFill>
-                <a:latin typeface="Aptos"/>
-              </a:defRPr>
-            </a:pPr>
-            <a:r>
-              <a:t>The requested feature responds to the input.</a:t>
-            </a:r>
-          </a:p>
-        </p:txBody>
-      </p:sp>
-      <p:sp>
-        <p:nvSpPr>
-          <p:cNvPr id="20" name="TextBox 19"/>
-          <p:cNvSpPr txBox="1"/>
-          <p:nvPr/>
-        </p:nvSpPr>
-        <p:spPr>
-          <a:xfrm>
-            <a:off x="777240" y="5650992"/>
-            <a:ext cx="292608" cy="365760"/>
-          </a:xfrm>
-          <a:prstGeom prst="rect">
-            <a:avLst/>
-          </a:prstGeom>
-          <a:noFill/>
-        </p:spPr>
-        <p:txBody>
-          <a:bodyPr wrap="square" lIns="45720" rIns="45720" tIns="27432" bIns="27432" anchor="t">
-            <a:spAutoFit/>
-          </a:bodyPr>
-          <a:lstStyle/>
-          <a:p>
-            <a:pPr algn="l">
-              <a:defRPr sz="2200" b="1">
-                <a:solidFill>
-                  <a:srgbClr val="305D9C"/>
-                </a:solidFill>
-                <a:latin typeface="Aptos"/>
-              </a:defRPr>
-            </a:pPr>
-            <a:r>
-              <a:t>•</a:t>
-            </a:r>
-          </a:p>
-        </p:txBody>
-      </p:sp>
-      <p:sp>
-        <p:nvSpPr>
-          <p:cNvPr id="21" name="TextBox 20"/>
-          <p:cNvSpPr txBox="1"/>
-          <p:nvPr/>
-        </p:nvSpPr>
-        <p:spPr>
-          <a:xfrm>
-            <a:off x="1115568" y="5641848"/>
-            <a:ext cx="10241280" cy="384048"/>
-          </a:xfrm>
-          <a:prstGeom prst="rect">
-            <a:avLst/>
-          </a:prstGeom>
-          <a:noFill/>
-        </p:spPr>
-        <p:txBody>
-          <a:bodyPr wrap="square" lIns="45720" rIns="45720" tIns="27432" bIns="27432" anchor="t">
-            <a:spAutoFit/>
-          </a:bodyPr>
-          <a:lstStyle/>
-          <a:p>
-            <a:pPr algn="l">
-              <a:defRPr sz="1700" b="0">
-                <a:solidFill>
-                  <a:srgbClr val="23272F"/>
-                </a:solidFill>
-                <a:latin typeface="Aptos"/>
-              </a:defRPr>
-            </a:pPr>
-            <a:r>
-              <a:t>The displayed / returned value matches the operation.</a:t>
+              <a:t>What happens when the input changes?</a:t>
             </a:r>
           </a:p>
         </p:txBody>
